--- a/public/lessons/year-6-maths/spring/week-17/find-the-whole-from-a-percentage/teaching-powerpoint-v1.pptx
+++ b/public/lessons/year-6-maths/spring/week-17/find-the-whole-from-a-percentage/teaching-powerpoint-v1.pptx
@@ -2,24 +2,24 @@
 <file path=ppt/presentation.xml><?xml version="1.0" encoding="utf-8"?>
 <p:presentation xmlns:p="http://schemas.openxmlformats.org/presentationml/2006/main">
   <p:sldMasterIdLst>
-    <p:sldMasterId xmlns:r="http://schemas.openxmlformats.org/officeDocument/2006/relationships" id="2147483648" r:id="R56787279c6c44bc1"/>
+    <p:sldMasterId xmlns:r="http://schemas.openxmlformats.org/officeDocument/2006/relationships" id="2147483648" r:id="R9fe109c1d1ce4641"/>
   </p:sldMasterIdLst>
   <p:notesMasterIdLst>
-    <p:notesMasterId xmlns:r="http://schemas.openxmlformats.org/officeDocument/2006/relationships" r:id="R04f473293f9f44d4"/>
+    <p:notesMasterId xmlns:r="http://schemas.openxmlformats.org/officeDocument/2006/relationships" r:id="R704493f62b09459f"/>
   </p:notesMasterIdLst>
   <p:sldIdLst>
-    <p:sldId xmlns:r="http://schemas.openxmlformats.org/officeDocument/2006/relationships" id="256" r:id="R481531a997d8422b"/>
-    <p:sldId xmlns:r="http://schemas.openxmlformats.org/officeDocument/2006/relationships" id="257" r:id="R9dbe2edd0e6c47ed"/>
-    <p:sldId xmlns:r="http://schemas.openxmlformats.org/officeDocument/2006/relationships" id="258" r:id="R0f25ea85338743eb"/>
-    <p:sldId xmlns:r="http://schemas.openxmlformats.org/officeDocument/2006/relationships" id="259" r:id="Rc6276e801a5e4225"/>
-    <p:sldId xmlns:r="http://schemas.openxmlformats.org/officeDocument/2006/relationships" id="260" r:id="Rf31a734d0e704244"/>
-    <p:sldId xmlns:r="http://schemas.openxmlformats.org/officeDocument/2006/relationships" id="261" r:id="R16bc6f87bc284033"/>
-    <p:sldId xmlns:r="http://schemas.openxmlformats.org/officeDocument/2006/relationships" id="262" r:id="R93b173b2504347d8"/>
-    <p:sldId xmlns:r="http://schemas.openxmlformats.org/officeDocument/2006/relationships" id="263" r:id="R394ed938b7c448ec"/>
-    <p:sldId xmlns:r="http://schemas.openxmlformats.org/officeDocument/2006/relationships" id="264" r:id="R1b78e7a2251c4e73"/>
-    <p:sldId xmlns:r="http://schemas.openxmlformats.org/officeDocument/2006/relationships" id="265" r:id="Rc94fe3d0bc684075"/>
-    <p:sldId xmlns:r="http://schemas.openxmlformats.org/officeDocument/2006/relationships" id="266" r:id="R7175c230aebb4e1e"/>
-    <p:sldId xmlns:r="http://schemas.openxmlformats.org/officeDocument/2006/relationships" id="267" r:id="R18962f7b1b4f40a2"/>
+    <p:sldId xmlns:r="http://schemas.openxmlformats.org/officeDocument/2006/relationships" id="256" r:id="R4c26cdb0c8fb419e"/>
+    <p:sldId xmlns:r="http://schemas.openxmlformats.org/officeDocument/2006/relationships" id="257" r:id="R922254703ef04161"/>
+    <p:sldId xmlns:r="http://schemas.openxmlformats.org/officeDocument/2006/relationships" id="258" r:id="R46d792ed51214b1d"/>
+    <p:sldId xmlns:r="http://schemas.openxmlformats.org/officeDocument/2006/relationships" id="259" r:id="R5f92734463504504"/>
+    <p:sldId xmlns:r="http://schemas.openxmlformats.org/officeDocument/2006/relationships" id="260" r:id="R0ccb06d3ebad493b"/>
+    <p:sldId xmlns:r="http://schemas.openxmlformats.org/officeDocument/2006/relationships" id="261" r:id="R1aac6a405323424a"/>
+    <p:sldId xmlns:r="http://schemas.openxmlformats.org/officeDocument/2006/relationships" id="262" r:id="Rd47e207eeed14f20"/>
+    <p:sldId xmlns:r="http://schemas.openxmlformats.org/officeDocument/2006/relationships" id="263" r:id="Rccfeab0ae1d24324"/>
+    <p:sldId xmlns:r="http://schemas.openxmlformats.org/officeDocument/2006/relationships" id="264" r:id="Rff905659d3464094"/>
+    <p:sldId xmlns:r="http://schemas.openxmlformats.org/officeDocument/2006/relationships" id="265" r:id="Rc3b93e41a8034446"/>
+    <p:sldId xmlns:r="http://schemas.openxmlformats.org/officeDocument/2006/relationships" id="266" r:id="R88859ca013694a71"/>
+    <p:sldId xmlns:r="http://schemas.openxmlformats.org/officeDocument/2006/relationships" id="267" r:id="Rf4c839f661d24aa9"/>
   </p:sldIdLst>
   <p:sldSz cx="12192000" cy="6858000"/>
   <p:notesSz cx="6858000" cy="9144000"/>
@@ -873,7 +873,7 @@
           <a:lstStyle xmlns:a="http://schemas.openxmlformats.org/drawingml/2006/main"/>
           <a:p xmlns:a="http://schemas.openxmlformats.org/drawingml/2006/main">
             <a:r>
-              <a:t>I do. Reveal the question, setup and each calculation stage one click at a time. Pupils watch before copying. Model answer: 240.</a:t>
+              <a:t>I do. Reveal the question, then reveal each mathematical change one click at a time. Point to the numbers and operation that changed before moving to the next line. Final answer: 240.</a:t>
             </a:r>
           </a:p>
         </p:txBody>
@@ -1291,7 +1291,7 @@
   </p:cSld>
   <p:clrMap bg1="lt1" tx1="dk1" bg2="lt2" tx2="dk2" accent1="accent1" accent2="accent2" accent3="accent3" accent4="accent4" accent5="accent5" accent6="accent6" hlink="hlink" folHlink="folHlink"/>
   <p:sldLayoutIdLst>
-    <p:sldLayoutId xmlns:r="http://schemas.openxmlformats.org/officeDocument/2006/relationships" id="2147483649" r:id="R6b86588d65c84b99"/>
+    <p:sldLayoutId xmlns:r="http://schemas.openxmlformats.org/officeDocument/2006/relationships" id="2147483649" r:id="Rcdb02308e551404b"/>
   </p:sldLayoutIdLst>
   <p:txStyles>
     <p:titleStyle>
@@ -1842,7 +1842,7 @@
           <p:cNvPr id="12" name="">
             <a:extLst xmlns:a="http://schemas.openxmlformats.org/drawingml/2006/main">
               <a:ext uri="{FF2B5EF4-FFF2-40B4-BE49-F238E27FC236}">
-                <a16:creationId xmlns:a16="http://schemas.microsoft.com/office/drawing/2014/main" id="{72312EF0-7879-4174-8B48-B4AF4BCF80FB}"/>
+                <a16:creationId xmlns:a16="http://schemas.microsoft.com/office/drawing/2014/main" id="{333200F3-10AC-41A2-BAF2-61D7A1C129AE}"/>
               </a:ext>
             </a:extLst>
           </p:cNvPr>
@@ -1874,7 +1874,7 @@
           <p:cNvPr id="2" name="">
             <a:extLst xmlns:a="http://schemas.openxmlformats.org/drawingml/2006/main">
               <a:ext uri="{FF2B5EF4-FFF2-40B4-BE49-F238E27FC236}">
-                <a16:creationId xmlns:a16="http://schemas.microsoft.com/office/drawing/2014/main" id="{E179E43E-00BB-408C-9DD0-D510604B8BB6}"/>
+                <a16:creationId xmlns:a16="http://schemas.microsoft.com/office/drawing/2014/main" id="{F2EEAAF9-E844-44F0-81E5-17823FC5E6A5}"/>
               </a:ext>
             </a:extLst>
           </p:cNvPr>
@@ -1931,7 +1931,7 @@
           <p:cNvPr id="3" name="">
             <a:extLst xmlns:a="http://schemas.openxmlformats.org/drawingml/2006/main">
               <a:ext uri="{FF2B5EF4-FFF2-40B4-BE49-F238E27FC236}">
-                <a16:creationId xmlns:a16="http://schemas.microsoft.com/office/drawing/2014/main" id="{F6C028E5-62DA-4BF1-963D-23276DD8488C}"/>
+                <a16:creationId xmlns:a16="http://schemas.microsoft.com/office/drawing/2014/main" id="{30610812-CB64-48C7-80AC-E9465885F8CD}"/>
               </a:ext>
             </a:extLst>
           </p:cNvPr>
@@ -1965,7 +1965,7 @@
           <p:cNvPr id="4" name="">
             <a:extLst xmlns:a="http://schemas.openxmlformats.org/drawingml/2006/main">
               <a:ext uri="{FF2B5EF4-FFF2-40B4-BE49-F238E27FC236}">
-                <a16:creationId xmlns:a16="http://schemas.microsoft.com/office/drawing/2014/main" id="{9E58DE2C-41D1-44AD-861A-1DFD92C53DDE}"/>
+                <a16:creationId xmlns:a16="http://schemas.microsoft.com/office/drawing/2014/main" id="{D400B1EE-3FBF-4EED-AE5F-9001882E23BE}"/>
               </a:ext>
             </a:extLst>
           </p:cNvPr>
@@ -2022,7 +2022,7 @@
           <p:cNvPr id="5" name="">
             <a:extLst xmlns:a="http://schemas.openxmlformats.org/drawingml/2006/main">
               <a:ext uri="{FF2B5EF4-FFF2-40B4-BE49-F238E27FC236}">
-                <a16:creationId xmlns:a16="http://schemas.microsoft.com/office/drawing/2014/main" id="{01151B0E-F29A-487C-8735-6A6E1124762F}"/>
+                <a16:creationId xmlns:a16="http://schemas.microsoft.com/office/drawing/2014/main" id="{9C999467-E471-43FF-BD01-7C93EA0975B9}"/>
               </a:ext>
             </a:extLst>
           </p:cNvPr>
@@ -2079,7 +2079,7 @@
           <p:cNvPr id="6" name="">
             <a:extLst xmlns:a="http://schemas.openxmlformats.org/drawingml/2006/main">
               <a:ext uri="{FF2B5EF4-FFF2-40B4-BE49-F238E27FC236}">
-                <a16:creationId xmlns:a16="http://schemas.microsoft.com/office/drawing/2014/main" id="{E5F12418-6843-4E1F-8C2C-CC4C400F7B08}"/>
+                <a16:creationId xmlns:a16="http://schemas.microsoft.com/office/drawing/2014/main" id="{AFC4A0F5-9758-4EEF-B184-35C545866E95}"/>
               </a:ext>
             </a:extLst>
           </p:cNvPr>
@@ -2113,7 +2113,7 @@
           <p:cNvPr id="7" name="">
             <a:extLst xmlns:a="http://schemas.openxmlformats.org/drawingml/2006/main">
               <a:ext uri="{FF2B5EF4-FFF2-40B4-BE49-F238E27FC236}">
-                <a16:creationId xmlns:a16="http://schemas.microsoft.com/office/drawing/2014/main" id="{5550DE54-81DF-4A0A-AEE0-AA41F26DAD2E}"/>
+                <a16:creationId xmlns:a16="http://schemas.microsoft.com/office/drawing/2014/main" id="{533B7D0B-8785-493A-97F0-8147D3652C6D}"/>
               </a:ext>
             </a:extLst>
           </p:cNvPr>
@@ -2170,7 +2170,7 @@
           <p:cNvPr id="8" name="">
             <a:extLst xmlns:a="http://schemas.openxmlformats.org/drawingml/2006/main">
               <a:ext uri="{FF2B5EF4-FFF2-40B4-BE49-F238E27FC236}">
-                <a16:creationId xmlns:a16="http://schemas.microsoft.com/office/drawing/2014/main" id="{44CEFC7E-AF5D-4ABE-9376-DA4B29E420C4}"/>
+                <a16:creationId xmlns:a16="http://schemas.microsoft.com/office/drawing/2014/main" id="{4F8EE179-9544-4BEA-A74C-AE8890BAAFB1}"/>
               </a:ext>
             </a:extLst>
           </p:cNvPr>
@@ -2227,7 +2227,7 @@
           <p:cNvPr id="9" name="">
             <a:extLst xmlns:a="http://schemas.openxmlformats.org/drawingml/2006/main">
               <a:ext uri="{FF2B5EF4-FFF2-40B4-BE49-F238E27FC236}">
-                <a16:creationId xmlns:a16="http://schemas.microsoft.com/office/drawing/2014/main" id="{F8D1E894-F695-4701-8CFE-8F65E6FB5C52}"/>
+                <a16:creationId xmlns:a16="http://schemas.microsoft.com/office/drawing/2014/main" id="{D5E719C7-456A-491C-B86F-EC36EF5BCBBF}"/>
               </a:ext>
             </a:extLst>
           </p:cNvPr>
@@ -2284,7 +2284,7 @@
           <p:cNvPr id="10" name="">
             <a:extLst xmlns:a="http://schemas.openxmlformats.org/drawingml/2006/main">
               <a:ext uri="{FF2B5EF4-FFF2-40B4-BE49-F238E27FC236}">
-                <a16:creationId xmlns:a16="http://schemas.microsoft.com/office/drawing/2014/main" id="{73F38999-6FA5-4F40-9C64-32113928CFFA}"/>
+                <a16:creationId xmlns:a16="http://schemas.microsoft.com/office/drawing/2014/main" id="{CD208F27-2329-4A8A-9432-68041F7936A8}"/>
               </a:ext>
             </a:extLst>
           </p:cNvPr>
@@ -2341,7 +2341,7 @@
           <p:cNvPr id="11" name="">
             <a:extLst xmlns:a="http://schemas.openxmlformats.org/drawingml/2006/main">
               <a:ext uri="{FF2B5EF4-FFF2-40B4-BE49-F238E27FC236}">
-                <a16:creationId xmlns:a16="http://schemas.microsoft.com/office/drawing/2014/main" id="{3EE6E1FB-8FC8-4C2E-B38E-A21E6A8DBB2E}"/>
+                <a16:creationId xmlns:a16="http://schemas.microsoft.com/office/drawing/2014/main" id="{CC8202B3-85D9-4EF4-82D2-B44433040D6E}"/>
               </a:ext>
             </a:extLst>
           </p:cNvPr>
@@ -2396,7 +2396,7 @@
     </p:spTree>
     <p:extLst>
       <p:ext uri="{BB962C8B-B14F-4D97-AF65-F5344CB8AC3E}">
-        <p14:creationId xmlns:p14="http://schemas.microsoft.com/office/powerpoint/2010/main" val="254318888"/>
+        <p14:creationId xmlns:p14="http://schemas.microsoft.com/office/powerpoint/2010/main" val="2129689073"/>
       </p:ext>
     </p:extLst>
   </p:cSld>
@@ -2427,7 +2427,7 @@
           <p:cNvPr id="14" name="">
             <a:extLst xmlns:a="http://schemas.openxmlformats.org/drawingml/2006/main">
               <a:ext uri="{FF2B5EF4-FFF2-40B4-BE49-F238E27FC236}">
-                <a16:creationId xmlns:a16="http://schemas.microsoft.com/office/drawing/2014/main" id="{21A7978D-1265-4158-966C-9AA0AA17EB1B}"/>
+                <a16:creationId xmlns:a16="http://schemas.microsoft.com/office/drawing/2014/main" id="{CDEB821B-390E-460B-AC4F-DF67F660BACE}"/>
               </a:ext>
             </a:extLst>
           </p:cNvPr>
@@ -2459,7 +2459,7 @@
           <p:cNvPr id="2" name="">
             <a:extLst xmlns:a="http://schemas.openxmlformats.org/drawingml/2006/main">
               <a:ext uri="{FF2B5EF4-FFF2-40B4-BE49-F238E27FC236}">
-                <a16:creationId xmlns:a16="http://schemas.microsoft.com/office/drawing/2014/main" id="{CB2BFA57-D8BB-480F-A5D3-0B87CF651058}"/>
+                <a16:creationId xmlns:a16="http://schemas.microsoft.com/office/drawing/2014/main" id="{9882AF90-E85B-46FD-87E6-98193FE5D79D}"/>
               </a:ext>
             </a:extLst>
           </p:cNvPr>
@@ -2516,7 +2516,7 @@
           <p:cNvPr id="3" name="">
             <a:extLst xmlns:a="http://schemas.openxmlformats.org/drawingml/2006/main">
               <a:ext uri="{FF2B5EF4-FFF2-40B4-BE49-F238E27FC236}">
-                <a16:creationId xmlns:a16="http://schemas.microsoft.com/office/drawing/2014/main" id="{26DC5002-4F9A-4C49-829B-EF0F700AFDE7}"/>
+                <a16:creationId xmlns:a16="http://schemas.microsoft.com/office/drawing/2014/main" id="{FC95D511-0E94-483E-B0F3-FF4C87D01592}"/>
               </a:ext>
             </a:extLst>
           </p:cNvPr>
@@ -2548,7 +2548,7 @@
           <p:cNvPr id="4" name="">
             <a:extLst xmlns:a="http://schemas.openxmlformats.org/drawingml/2006/main">
               <a:ext uri="{FF2B5EF4-FFF2-40B4-BE49-F238E27FC236}">
-                <a16:creationId xmlns:a16="http://schemas.microsoft.com/office/drawing/2014/main" id="{8520E711-F8CE-4F64-B10B-46BF6109D892}"/>
+                <a16:creationId xmlns:a16="http://schemas.microsoft.com/office/drawing/2014/main" id="{D4D5456F-372B-4618-B644-F472EB3ED451}"/>
               </a:ext>
             </a:extLst>
           </p:cNvPr>
@@ -2605,7 +2605,7 @@
           <p:cNvPr id="5" name="">
             <a:extLst xmlns:a="http://schemas.openxmlformats.org/drawingml/2006/main">
               <a:ext uri="{FF2B5EF4-FFF2-40B4-BE49-F238E27FC236}">
-                <a16:creationId xmlns:a16="http://schemas.microsoft.com/office/drawing/2014/main" id="{5BA4C905-ECC5-4B2F-8636-6BDC2AF1CB99}"/>
+                <a16:creationId xmlns:a16="http://schemas.microsoft.com/office/drawing/2014/main" id="{347AB93B-DEBD-4E63-AD51-29AB845F4E55}"/>
               </a:ext>
             </a:extLst>
           </p:cNvPr>
@@ -2662,7 +2662,7 @@
           <p:cNvPr id="6" name="">
             <a:extLst xmlns:a="http://schemas.openxmlformats.org/drawingml/2006/main">
               <a:ext uri="{FF2B5EF4-FFF2-40B4-BE49-F238E27FC236}">
-                <a16:creationId xmlns:a16="http://schemas.microsoft.com/office/drawing/2014/main" id="{36CC13C6-A349-4472-84CD-645E6698322E}"/>
+                <a16:creationId xmlns:a16="http://schemas.microsoft.com/office/drawing/2014/main" id="{AC2A23D2-EC05-48B9-A553-0003E0161C8A}"/>
               </a:ext>
             </a:extLst>
           </p:cNvPr>
@@ -2719,7 +2719,7 @@
           <p:cNvPr id="7" name="">
             <a:extLst xmlns:a="http://schemas.openxmlformats.org/drawingml/2006/main">
               <a:ext uri="{FF2B5EF4-FFF2-40B4-BE49-F238E27FC236}">
-                <a16:creationId xmlns:a16="http://schemas.microsoft.com/office/drawing/2014/main" id="{8E8D7213-0B2E-4DBE-B4AA-88D0B6DB66C7}"/>
+                <a16:creationId xmlns:a16="http://schemas.microsoft.com/office/drawing/2014/main" id="{8DE89874-500B-46F6-8A44-FE756325145F}"/>
               </a:ext>
             </a:extLst>
           </p:cNvPr>
@@ -2751,7 +2751,7 @@
           <p:cNvPr id="8" name="">
             <a:extLst xmlns:a="http://schemas.openxmlformats.org/drawingml/2006/main">
               <a:ext uri="{FF2B5EF4-FFF2-40B4-BE49-F238E27FC236}">
-                <a16:creationId xmlns:a16="http://schemas.microsoft.com/office/drawing/2014/main" id="{195A65FF-155E-4580-9AE6-4A71A3119DE1}"/>
+                <a16:creationId xmlns:a16="http://schemas.microsoft.com/office/drawing/2014/main" id="{BA49BB1D-F094-4D92-9636-D26BA1E12507}"/>
               </a:ext>
             </a:extLst>
           </p:cNvPr>
@@ -2808,7 +2808,7 @@
           <p:cNvPr id="9" name="">
             <a:extLst xmlns:a="http://schemas.openxmlformats.org/drawingml/2006/main">
               <a:ext uri="{FF2B5EF4-FFF2-40B4-BE49-F238E27FC236}">
-                <a16:creationId xmlns:a16="http://schemas.microsoft.com/office/drawing/2014/main" id="{5FB98CD2-5F5A-458B-A5A3-73A0FB10C5FF}"/>
+                <a16:creationId xmlns:a16="http://schemas.microsoft.com/office/drawing/2014/main" id="{75013B6F-582A-4EF7-9196-C66ECBC2B6C3}"/>
               </a:ext>
             </a:extLst>
           </p:cNvPr>
@@ -2865,7 +2865,7 @@
           <p:cNvPr id="10" name="">
             <a:extLst xmlns:a="http://schemas.openxmlformats.org/drawingml/2006/main">
               <a:ext uri="{FF2B5EF4-FFF2-40B4-BE49-F238E27FC236}">
-                <a16:creationId xmlns:a16="http://schemas.microsoft.com/office/drawing/2014/main" id="{4C03D1BD-97C5-4677-8E61-C07530AAF175}"/>
+                <a16:creationId xmlns:a16="http://schemas.microsoft.com/office/drawing/2014/main" id="{6AFA487A-D4CA-4EBE-8856-3B613CC59D2B}"/>
               </a:ext>
             </a:extLst>
           </p:cNvPr>
@@ -2922,7 +2922,7 @@
           <p:cNvPr id="11" name="">
             <a:extLst xmlns:a="http://schemas.openxmlformats.org/drawingml/2006/main">
               <a:ext uri="{FF2B5EF4-FFF2-40B4-BE49-F238E27FC236}">
-                <a16:creationId xmlns:a16="http://schemas.microsoft.com/office/drawing/2014/main" id="{0F8B45B8-BBDE-49FC-881B-1A76D025384F}"/>
+                <a16:creationId xmlns:a16="http://schemas.microsoft.com/office/drawing/2014/main" id="{EB16A557-61E2-4752-9684-514035B64537}"/>
               </a:ext>
             </a:extLst>
           </p:cNvPr>
@@ -2979,7 +2979,7 @@
           <p:cNvPr id="12" name="">
             <a:extLst xmlns:a="http://schemas.openxmlformats.org/drawingml/2006/main">
               <a:ext uri="{FF2B5EF4-FFF2-40B4-BE49-F238E27FC236}">
-                <a16:creationId xmlns:a16="http://schemas.microsoft.com/office/drawing/2014/main" id="{9E13A8A1-48E9-43DC-8A54-BC2605DEA47F}"/>
+                <a16:creationId xmlns:a16="http://schemas.microsoft.com/office/drawing/2014/main" id="{01F6635A-C2B0-4C4E-A94E-578DF9EB0E14}"/>
               </a:ext>
             </a:extLst>
           </p:cNvPr>
@@ -3036,7 +3036,7 @@
           <p:cNvPr id="13" name="">
             <a:extLst xmlns:a="http://schemas.openxmlformats.org/drawingml/2006/main">
               <a:ext uri="{FF2B5EF4-FFF2-40B4-BE49-F238E27FC236}">
-                <a16:creationId xmlns:a16="http://schemas.microsoft.com/office/drawing/2014/main" id="{AA088B89-CD8E-47E3-92B4-52BA6EB3B2DA}"/>
+                <a16:creationId xmlns:a16="http://schemas.microsoft.com/office/drawing/2014/main" id="{C0A4A9F8-A3FE-4AE0-A922-9CA51DBA0C22}"/>
               </a:ext>
             </a:extLst>
           </p:cNvPr>
@@ -3091,7 +3091,7 @@
     </p:spTree>
     <p:extLst>
       <p:ext uri="{BB962C8B-B14F-4D97-AF65-F5344CB8AC3E}">
-        <p14:creationId xmlns:p14="http://schemas.microsoft.com/office/powerpoint/2010/main" val="1066276927"/>
+        <p14:creationId xmlns:p14="http://schemas.microsoft.com/office/powerpoint/2010/main" val="1252305355"/>
       </p:ext>
     </p:extLst>
   </p:cSld>
@@ -3292,7 +3292,7 @@
           <p:cNvPr id="19" name="">
             <a:extLst xmlns:a="http://schemas.openxmlformats.org/drawingml/2006/main">
               <a:ext uri="{FF2B5EF4-FFF2-40B4-BE49-F238E27FC236}">
-                <a16:creationId xmlns:a16="http://schemas.microsoft.com/office/drawing/2014/main" id="{510CA006-BDFF-4B23-AA58-B263540A011A}"/>
+                <a16:creationId xmlns:a16="http://schemas.microsoft.com/office/drawing/2014/main" id="{3C95E424-F8EB-4CCE-ACDD-FD5BCB5C9BC8}"/>
               </a:ext>
             </a:extLst>
           </p:cNvPr>
@@ -3324,7 +3324,7 @@
           <p:cNvPr id="2" name="">
             <a:extLst xmlns:a="http://schemas.openxmlformats.org/drawingml/2006/main">
               <a:ext uri="{FF2B5EF4-FFF2-40B4-BE49-F238E27FC236}">
-                <a16:creationId xmlns:a16="http://schemas.microsoft.com/office/drawing/2014/main" id="{4F81FFF5-E40D-4540-BADF-ED4C95BDB95C}"/>
+                <a16:creationId xmlns:a16="http://schemas.microsoft.com/office/drawing/2014/main" id="{A00A4310-AFD1-4C1E-A770-767ED05A245D}"/>
               </a:ext>
             </a:extLst>
           </p:cNvPr>
@@ -3381,7 +3381,7 @@
           <p:cNvPr id="3" name="">
             <a:extLst xmlns:a="http://schemas.openxmlformats.org/drawingml/2006/main">
               <a:ext uri="{FF2B5EF4-FFF2-40B4-BE49-F238E27FC236}">
-                <a16:creationId xmlns:a16="http://schemas.microsoft.com/office/drawing/2014/main" id="{9B2A7456-23DE-4D06-991C-C2034AC3AEE6}"/>
+                <a16:creationId xmlns:a16="http://schemas.microsoft.com/office/drawing/2014/main" id="{EA816575-6097-4F89-A2A5-E07B56986792}"/>
               </a:ext>
             </a:extLst>
           </p:cNvPr>
@@ -3413,7 +3413,7 @@
           <p:cNvPr id="4" name="">
             <a:extLst xmlns:a="http://schemas.openxmlformats.org/drawingml/2006/main">
               <a:ext uri="{FF2B5EF4-FFF2-40B4-BE49-F238E27FC236}">
-                <a16:creationId xmlns:a16="http://schemas.microsoft.com/office/drawing/2014/main" id="{D8228BD3-6CB8-45B4-88A5-BCCE68D33B6B}"/>
+                <a16:creationId xmlns:a16="http://schemas.microsoft.com/office/drawing/2014/main" id="{A02A04C3-016D-4092-97CE-DE62097645AB}"/>
               </a:ext>
             </a:extLst>
           </p:cNvPr>
@@ -3470,7 +3470,7 @@
           <p:cNvPr id="5" name="">
             <a:extLst xmlns:a="http://schemas.openxmlformats.org/drawingml/2006/main">
               <a:ext uri="{FF2B5EF4-FFF2-40B4-BE49-F238E27FC236}">
-                <a16:creationId xmlns:a16="http://schemas.microsoft.com/office/drawing/2014/main" id="{5AB7EABF-F373-4B2D-976E-B214EC999BED}"/>
+                <a16:creationId xmlns:a16="http://schemas.microsoft.com/office/drawing/2014/main" id="{A5730123-6D66-4E7A-ACF1-4ACECBC108B6}"/>
               </a:ext>
             </a:extLst>
           </p:cNvPr>
@@ -3527,7 +3527,7 @@
           <p:cNvPr id="6" name="">
             <a:extLst xmlns:a="http://schemas.openxmlformats.org/drawingml/2006/main">
               <a:ext uri="{FF2B5EF4-FFF2-40B4-BE49-F238E27FC236}">
-                <a16:creationId xmlns:a16="http://schemas.microsoft.com/office/drawing/2014/main" id="{162371A9-A610-42E7-8739-28A826F6D14A}"/>
+                <a16:creationId xmlns:a16="http://schemas.microsoft.com/office/drawing/2014/main" id="{03F61801-558E-4C9E-B913-BC44A3365058}"/>
               </a:ext>
             </a:extLst>
           </p:cNvPr>
@@ -3584,7 +3584,7 @@
           <p:cNvPr id="7" name="">
             <a:extLst xmlns:a="http://schemas.openxmlformats.org/drawingml/2006/main">
               <a:ext uri="{FF2B5EF4-FFF2-40B4-BE49-F238E27FC236}">
-                <a16:creationId xmlns:a16="http://schemas.microsoft.com/office/drawing/2014/main" id="{C95554C3-54CC-463B-82F4-7C5EF99ADC64}"/>
+                <a16:creationId xmlns:a16="http://schemas.microsoft.com/office/drawing/2014/main" id="{C1CB8B2A-2B52-4700-9D13-D739B6A74B3E}"/>
               </a:ext>
             </a:extLst>
           </p:cNvPr>
@@ -3616,7 +3616,7 @@
           <p:cNvPr id="8" name="">
             <a:extLst xmlns:a="http://schemas.openxmlformats.org/drawingml/2006/main">
               <a:ext uri="{FF2B5EF4-FFF2-40B4-BE49-F238E27FC236}">
-                <a16:creationId xmlns:a16="http://schemas.microsoft.com/office/drawing/2014/main" id="{9D3EC208-4BF3-4B17-A76B-BA5348F134E3}"/>
+                <a16:creationId xmlns:a16="http://schemas.microsoft.com/office/drawing/2014/main" id="{56D7A667-9B1D-42B6-8158-648FA6D09720}"/>
               </a:ext>
             </a:extLst>
           </p:cNvPr>
@@ -3673,7 +3673,7 @@
           <p:cNvPr id="9" name="">
             <a:extLst xmlns:a="http://schemas.openxmlformats.org/drawingml/2006/main">
               <a:ext uri="{FF2B5EF4-FFF2-40B4-BE49-F238E27FC236}">
-                <a16:creationId xmlns:a16="http://schemas.microsoft.com/office/drawing/2014/main" id="{1438DC87-9844-4748-9384-B7792F8D0579}"/>
+                <a16:creationId xmlns:a16="http://schemas.microsoft.com/office/drawing/2014/main" id="{0409F8D1-C8BA-4543-88F8-AA6BBA348205}"/>
               </a:ext>
             </a:extLst>
           </p:cNvPr>
@@ -3730,7 +3730,7 @@
           <p:cNvPr id="10" name="">
             <a:extLst xmlns:a="http://schemas.openxmlformats.org/drawingml/2006/main">
               <a:ext uri="{FF2B5EF4-FFF2-40B4-BE49-F238E27FC236}">
-                <a16:creationId xmlns:a16="http://schemas.microsoft.com/office/drawing/2014/main" id="{9E1F8915-D309-4E3A-99DF-E0835773D5B5}"/>
+                <a16:creationId xmlns:a16="http://schemas.microsoft.com/office/drawing/2014/main" id="{62476FF7-7DBC-4182-B161-C37A7DE16EF4}"/>
               </a:ext>
             </a:extLst>
           </p:cNvPr>
@@ -3787,7 +3787,7 @@
           <p:cNvPr id="11" name="">
             <a:extLst xmlns:a="http://schemas.openxmlformats.org/drawingml/2006/main">
               <a:ext uri="{FF2B5EF4-FFF2-40B4-BE49-F238E27FC236}">
-                <a16:creationId xmlns:a16="http://schemas.microsoft.com/office/drawing/2014/main" id="{069DE70A-44BD-4BCE-9F5F-8ABFD278625D}"/>
+                <a16:creationId xmlns:a16="http://schemas.microsoft.com/office/drawing/2014/main" id="{EAD872FB-3FD9-4CF0-A4B1-6156F40F6131}"/>
               </a:ext>
             </a:extLst>
           </p:cNvPr>
@@ -3821,7 +3821,7 @@
           <p:cNvPr id="12" name="">
             <a:extLst xmlns:a="http://schemas.openxmlformats.org/drawingml/2006/main">
               <a:ext uri="{FF2B5EF4-FFF2-40B4-BE49-F238E27FC236}">
-                <a16:creationId xmlns:a16="http://schemas.microsoft.com/office/drawing/2014/main" id="{18344E95-8AB5-4C9C-B67B-3DF3FA98051C}"/>
+                <a16:creationId xmlns:a16="http://schemas.microsoft.com/office/drawing/2014/main" id="{5EECBBE8-F4FE-4430-90C8-741B488392FE}"/>
               </a:ext>
             </a:extLst>
           </p:cNvPr>
@@ -3878,7 +3878,7 @@
           <p:cNvPr id="13" name="">
             <a:extLst xmlns:a="http://schemas.openxmlformats.org/drawingml/2006/main">
               <a:ext uri="{FF2B5EF4-FFF2-40B4-BE49-F238E27FC236}">
-                <a16:creationId xmlns:a16="http://schemas.microsoft.com/office/drawing/2014/main" id="{2E4E79AE-6C73-4DCF-824E-16A68F698F8E}"/>
+                <a16:creationId xmlns:a16="http://schemas.microsoft.com/office/drawing/2014/main" id="{EC01D1F3-59BB-4FD4-967F-B9C8E7A3B936}"/>
               </a:ext>
             </a:extLst>
           </p:cNvPr>
@@ -3935,7 +3935,7 @@
           <p:cNvPr id="14" name="">
             <a:extLst xmlns:a="http://schemas.openxmlformats.org/drawingml/2006/main">
               <a:ext uri="{FF2B5EF4-FFF2-40B4-BE49-F238E27FC236}">
-                <a16:creationId xmlns:a16="http://schemas.microsoft.com/office/drawing/2014/main" id="{944D0C48-FF99-47A8-BC46-CB5CE429CC87}"/>
+                <a16:creationId xmlns:a16="http://schemas.microsoft.com/office/drawing/2014/main" id="{C77A827F-7B14-4289-982B-E76E0044F2F3}"/>
               </a:ext>
             </a:extLst>
           </p:cNvPr>
@@ -3992,7 +3992,7 @@
           <p:cNvPr id="15" name="">
             <a:extLst xmlns:a="http://schemas.openxmlformats.org/drawingml/2006/main">
               <a:ext uri="{FF2B5EF4-FFF2-40B4-BE49-F238E27FC236}">
-                <a16:creationId xmlns:a16="http://schemas.microsoft.com/office/drawing/2014/main" id="{FB4A1DA8-8B09-4173-9C17-5C1BB8CF6B14}"/>
+                <a16:creationId xmlns:a16="http://schemas.microsoft.com/office/drawing/2014/main" id="{C4BCC8A0-9B6E-45CA-A3C8-17F5AF7054D3}"/>
               </a:ext>
             </a:extLst>
           </p:cNvPr>
@@ -4026,7 +4026,7 @@
           <p:cNvPr id="16" name="">
             <a:extLst xmlns:a="http://schemas.openxmlformats.org/drawingml/2006/main">
               <a:ext uri="{FF2B5EF4-FFF2-40B4-BE49-F238E27FC236}">
-                <a16:creationId xmlns:a16="http://schemas.microsoft.com/office/drawing/2014/main" id="{B2DB203C-3C84-43A7-923A-5A2C5218B09D}"/>
+                <a16:creationId xmlns:a16="http://schemas.microsoft.com/office/drawing/2014/main" id="{8BDBA88C-D726-43A8-AD8D-A28B79214633}"/>
               </a:ext>
             </a:extLst>
           </p:cNvPr>
@@ -4083,7 +4083,7 @@
           <p:cNvPr id="17" name="">
             <a:extLst xmlns:a="http://schemas.openxmlformats.org/drawingml/2006/main">
               <a:ext uri="{FF2B5EF4-FFF2-40B4-BE49-F238E27FC236}">
-                <a16:creationId xmlns:a16="http://schemas.microsoft.com/office/drawing/2014/main" id="{5054BF8F-E8F1-404F-9E20-AD7558CBC223}"/>
+                <a16:creationId xmlns:a16="http://schemas.microsoft.com/office/drawing/2014/main" id="{1A4FD68B-B60F-491B-B006-DF862A5A5D01}"/>
               </a:ext>
             </a:extLst>
           </p:cNvPr>
@@ -4140,7 +4140,7 @@
           <p:cNvPr id="18" name="">
             <a:extLst xmlns:a="http://schemas.openxmlformats.org/drawingml/2006/main">
               <a:ext uri="{FF2B5EF4-FFF2-40B4-BE49-F238E27FC236}">
-                <a16:creationId xmlns:a16="http://schemas.microsoft.com/office/drawing/2014/main" id="{142AE97A-3A3D-4E41-81A6-3A2A8EF09627}"/>
+                <a16:creationId xmlns:a16="http://schemas.microsoft.com/office/drawing/2014/main" id="{A21E1382-49C4-4BE5-85F0-C098AB77B075}"/>
               </a:ext>
             </a:extLst>
           </p:cNvPr>
@@ -4195,7 +4195,7 @@
     </p:spTree>
     <p:extLst>
       <p:ext uri="{BB962C8B-B14F-4D97-AF65-F5344CB8AC3E}">
-        <p14:creationId xmlns:p14="http://schemas.microsoft.com/office/powerpoint/2010/main" val="821501394"/>
+        <p14:creationId xmlns:p14="http://schemas.microsoft.com/office/powerpoint/2010/main" val="1031443544"/>
       </p:ext>
     </p:extLst>
   </p:cSld>
@@ -4350,7 +4350,7 @@
           <p:cNvPr id="23" name="">
             <a:extLst xmlns:a="http://schemas.openxmlformats.org/drawingml/2006/main">
               <a:ext uri="{FF2B5EF4-FFF2-40B4-BE49-F238E27FC236}">
-                <a16:creationId xmlns:a16="http://schemas.microsoft.com/office/drawing/2014/main" id="{514A8C18-603A-45A6-8326-D69382395F55}"/>
+                <a16:creationId xmlns:a16="http://schemas.microsoft.com/office/drawing/2014/main" id="{B2A9C5E4-71CA-4C73-AFDC-A8C4016360BE}"/>
               </a:ext>
             </a:extLst>
           </p:cNvPr>
@@ -4382,7 +4382,7 @@
           <p:cNvPr id="2" name="">
             <a:extLst xmlns:a="http://schemas.openxmlformats.org/drawingml/2006/main">
               <a:ext uri="{FF2B5EF4-FFF2-40B4-BE49-F238E27FC236}">
-                <a16:creationId xmlns:a16="http://schemas.microsoft.com/office/drawing/2014/main" id="{06F2329B-BAD1-4E04-8615-5884FEC6608F}"/>
+                <a16:creationId xmlns:a16="http://schemas.microsoft.com/office/drawing/2014/main" id="{277EEE77-7456-447A-A827-E13EF8D84DBD}"/>
               </a:ext>
             </a:extLst>
           </p:cNvPr>
@@ -4439,7 +4439,7 @@
           <p:cNvPr id="3" name="">
             <a:extLst xmlns:a="http://schemas.openxmlformats.org/drawingml/2006/main">
               <a:ext uri="{FF2B5EF4-FFF2-40B4-BE49-F238E27FC236}">
-                <a16:creationId xmlns:a16="http://schemas.microsoft.com/office/drawing/2014/main" id="{C56DA33F-2273-4ECC-B289-DF215BCE4444}"/>
+                <a16:creationId xmlns:a16="http://schemas.microsoft.com/office/drawing/2014/main" id="{63226968-993B-4BEC-8D47-C311FAE7DCF9}"/>
               </a:ext>
             </a:extLst>
           </p:cNvPr>
@@ -4471,7 +4471,7 @@
           <p:cNvPr id="4" name="">
             <a:extLst xmlns:a="http://schemas.openxmlformats.org/drawingml/2006/main">
               <a:ext uri="{FF2B5EF4-FFF2-40B4-BE49-F238E27FC236}">
-                <a16:creationId xmlns:a16="http://schemas.microsoft.com/office/drawing/2014/main" id="{C7EFC982-A299-49C9-9A43-1C3BBDDCCFB8}"/>
+                <a16:creationId xmlns:a16="http://schemas.microsoft.com/office/drawing/2014/main" id="{8A92FC0D-247C-49B3-8F15-CDEA37D86438}"/>
               </a:ext>
             </a:extLst>
           </p:cNvPr>
@@ -4528,7 +4528,7 @@
           <p:cNvPr id="5" name="">
             <a:extLst xmlns:a="http://schemas.openxmlformats.org/drawingml/2006/main">
               <a:ext uri="{FF2B5EF4-FFF2-40B4-BE49-F238E27FC236}">
-                <a16:creationId xmlns:a16="http://schemas.microsoft.com/office/drawing/2014/main" id="{EA26EE24-6033-4F6F-BCCF-B46E3035B535}"/>
+                <a16:creationId xmlns:a16="http://schemas.microsoft.com/office/drawing/2014/main" id="{72CD9E09-7218-4CA8-9AA5-0BE28E8BB7A0}"/>
               </a:ext>
             </a:extLst>
           </p:cNvPr>
@@ -4585,7 +4585,7 @@
           <p:cNvPr id="6" name="">
             <a:extLst xmlns:a="http://schemas.openxmlformats.org/drawingml/2006/main">
               <a:ext uri="{FF2B5EF4-FFF2-40B4-BE49-F238E27FC236}">
-                <a16:creationId xmlns:a16="http://schemas.microsoft.com/office/drawing/2014/main" id="{4D3F310F-FECB-43D6-91A9-5C65DE7C512C}"/>
+                <a16:creationId xmlns:a16="http://schemas.microsoft.com/office/drawing/2014/main" id="{0C71FD6C-F4AF-49A0-94F8-A89ABC7D6DE9}"/>
               </a:ext>
             </a:extLst>
           </p:cNvPr>
@@ -4642,7 +4642,7 @@
           <p:cNvPr id="7" name="">
             <a:extLst xmlns:a="http://schemas.openxmlformats.org/drawingml/2006/main">
               <a:ext uri="{FF2B5EF4-FFF2-40B4-BE49-F238E27FC236}">
-                <a16:creationId xmlns:a16="http://schemas.microsoft.com/office/drawing/2014/main" id="{5DA9D11C-BD03-4BF3-A296-7F185940D02F}"/>
+                <a16:creationId xmlns:a16="http://schemas.microsoft.com/office/drawing/2014/main" id="{51A1818F-9CDD-4AAE-AF06-13ADC71D39DF}"/>
               </a:ext>
             </a:extLst>
           </p:cNvPr>
@@ -4674,7 +4674,7 @@
           <p:cNvPr id="8" name="">
             <a:extLst xmlns:a="http://schemas.openxmlformats.org/drawingml/2006/main">
               <a:ext uri="{FF2B5EF4-FFF2-40B4-BE49-F238E27FC236}">
-                <a16:creationId xmlns:a16="http://schemas.microsoft.com/office/drawing/2014/main" id="{038565DC-4603-4B91-9673-FA8EF52193F0}"/>
+                <a16:creationId xmlns:a16="http://schemas.microsoft.com/office/drawing/2014/main" id="{569BFA61-8053-41EF-A7EF-9ECC2ECC40A4}"/>
               </a:ext>
             </a:extLst>
           </p:cNvPr>
@@ -4731,7 +4731,7 @@
           <p:cNvPr id="9" name="">
             <a:extLst xmlns:a="http://schemas.openxmlformats.org/drawingml/2006/main">
               <a:ext uri="{FF2B5EF4-FFF2-40B4-BE49-F238E27FC236}">
-                <a16:creationId xmlns:a16="http://schemas.microsoft.com/office/drawing/2014/main" id="{9F6B80D5-3874-4D3A-BA59-50710F5DB0DE}"/>
+                <a16:creationId xmlns:a16="http://schemas.microsoft.com/office/drawing/2014/main" id="{0FE5410E-601D-4682-9E3B-B62DFF791EFA}"/>
               </a:ext>
             </a:extLst>
           </p:cNvPr>
@@ -4788,7 +4788,7 @@
           <p:cNvPr id="10" name="">
             <a:extLst xmlns:a="http://schemas.openxmlformats.org/drawingml/2006/main">
               <a:ext uri="{FF2B5EF4-FFF2-40B4-BE49-F238E27FC236}">
-                <a16:creationId xmlns:a16="http://schemas.microsoft.com/office/drawing/2014/main" id="{6677325F-9900-4AE9-980D-73D586BAE4B5}"/>
+                <a16:creationId xmlns:a16="http://schemas.microsoft.com/office/drawing/2014/main" id="{C3F44342-BF99-455F-813E-ABDA0FC28D8B}"/>
               </a:ext>
             </a:extLst>
           </p:cNvPr>
@@ -4822,7 +4822,7 @@
           <p:cNvPr id="11" name="">
             <a:extLst xmlns:a="http://schemas.openxmlformats.org/drawingml/2006/main">
               <a:ext uri="{FF2B5EF4-FFF2-40B4-BE49-F238E27FC236}">
-                <a16:creationId xmlns:a16="http://schemas.microsoft.com/office/drawing/2014/main" id="{8A8A9441-F436-47C4-9225-C56CC37AFA20}"/>
+                <a16:creationId xmlns:a16="http://schemas.microsoft.com/office/drawing/2014/main" id="{210A9D26-249D-4552-9A59-BFFBA5D0D0C8}"/>
               </a:ext>
             </a:extLst>
           </p:cNvPr>
@@ -4854,7 +4854,7 @@
           <p:cNvPr id="12" name="">
             <a:extLst xmlns:a="http://schemas.openxmlformats.org/drawingml/2006/main">
               <a:ext uri="{FF2B5EF4-FFF2-40B4-BE49-F238E27FC236}">
-                <a16:creationId xmlns:a16="http://schemas.microsoft.com/office/drawing/2014/main" id="{FFB4797C-88F0-450A-A68A-3A27B1C2202E}"/>
+                <a16:creationId xmlns:a16="http://schemas.microsoft.com/office/drawing/2014/main" id="{248ECED8-B72A-4B7A-BC8E-A18B4E4861D9}"/>
               </a:ext>
             </a:extLst>
           </p:cNvPr>
@@ -4911,7 +4911,7 @@
           <p:cNvPr id="13" name="">
             <a:extLst xmlns:a="http://schemas.openxmlformats.org/drawingml/2006/main">
               <a:ext uri="{FF2B5EF4-FFF2-40B4-BE49-F238E27FC236}">
-                <a16:creationId xmlns:a16="http://schemas.microsoft.com/office/drawing/2014/main" id="{02012388-667E-4857-B7BE-2DCF8CF1C45A}"/>
+                <a16:creationId xmlns:a16="http://schemas.microsoft.com/office/drawing/2014/main" id="{3335CF1E-9964-4B1D-A799-74389434C246}"/>
               </a:ext>
             </a:extLst>
           </p:cNvPr>
@@ -4968,7 +4968,7 @@
           <p:cNvPr id="14" name="">
             <a:extLst xmlns:a="http://schemas.openxmlformats.org/drawingml/2006/main">
               <a:ext uri="{FF2B5EF4-FFF2-40B4-BE49-F238E27FC236}">
-                <a16:creationId xmlns:a16="http://schemas.microsoft.com/office/drawing/2014/main" id="{2401F775-2487-4FF7-AC98-0BCF3E6092B5}"/>
+                <a16:creationId xmlns:a16="http://schemas.microsoft.com/office/drawing/2014/main" id="{DB40674E-E769-4D68-AE6F-8A66A49A6E9D}"/>
               </a:ext>
             </a:extLst>
           </p:cNvPr>
@@ -5002,7 +5002,7 @@
           <p:cNvPr id="15" name="">
             <a:extLst xmlns:a="http://schemas.openxmlformats.org/drawingml/2006/main">
               <a:ext uri="{FF2B5EF4-FFF2-40B4-BE49-F238E27FC236}">
-                <a16:creationId xmlns:a16="http://schemas.microsoft.com/office/drawing/2014/main" id="{95D2C37B-DB43-4F0D-AECD-882C97B66DF9}"/>
+                <a16:creationId xmlns:a16="http://schemas.microsoft.com/office/drawing/2014/main" id="{744C26CA-DF8F-4AFF-8726-DED4FF9014FD}"/>
               </a:ext>
             </a:extLst>
           </p:cNvPr>
@@ -5034,7 +5034,7 @@
           <p:cNvPr id="16" name="">
             <a:extLst xmlns:a="http://schemas.openxmlformats.org/drawingml/2006/main">
               <a:ext uri="{FF2B5EF4-FFF2-40B4-BE49-F238E27FC236}">
-                <a16:creationId xmlns:a16="http://schemas.microsoft.com/office/drawing/2014/main" id="{E689D03A-35AF-4B28-8E5A-3F4F129F9246}"/>
+                <a16:creationId xmlns:a16="http://schemas.microsoft.com/office/drawing/2014/main" id="{E09F8520-8785-4484-8BC5-D2E58E98681D}"/>
               </a:ext>
             </a:extLst>
           </p:cNvPr>
@@ -5091,7 +5091,7 @@
           <p:cNvPr id="17" name="">
             <a:extLst xmlns:a="http://schemas.openxmlformats.org/drawingml/2006/main">
               <a:ext uri="{FF2B5EF4-FFF2-40B4-BE49-F238E27FC236}">
-                <a16:creationId xmlns:a16="http://schemas.microsoft.com/office/drawing/2014/main" id="{AC22E5D3-D763-4C89-B217-09809BA78143}"/>
+                <a16:creationId xmlns:a16="http://schemas.microsoft.com/office/drawing/2014/main" id="{354C9256-3BA5-449A-8242-DF7E67F78C31}"/>
               </a:ext>
             </a:extLst>
           </p:cNvPr>
@@ -5148,7 +5148,7 @@
           <p:cNvPr id="18" name="">
             <a:extLst xmlns:a="http://schemas.openxmlformats.org/drawingml/2006/main">
               <a:ext uri="{FF2B5EF4-FFF2-40B4-BE49-F238E27FC236}">
-                <a16:creationId xmlns:a16="http://schemas.microsoft.com/office/drawing/2014/main" id="{FECAFBBA-6FC0-466A-8D19-03EC8FFC87F5}"/>
+                <a16:creationId xmlns:a16="http://schemas.microsoft.com/office/drawing/2014/main" id="{5232B8C8-7773-457C-A9F2-9B04BC4A4CAC}"/>
               </a:ext>
             </a:extLst>
           </p:cNvPr>
@@ -5182,7 +5182,7 @@
           <p:cNvPr id="19" name="">
             <a:extLst xmlns:a="http://schemas.openxmlformats.org/drawingml/2006/main">
               <a:ext uri="{FF2B5EF4-FFF2-40B4-BE49-F238E27FC236}">
-                <a16:creationId xmlns:a16="http://schemas.microsoft.com/office/drawing/2014/main" id="{F6B6C06D-7F88-4CC8-9688-36EBF17A8777}"/>
+                <a16:creationId xmlns:a16="http://schemas.microsoft.com/office/drawing/2014/main" id="{FF4032BA-BDE7-495A-9769-6FC183E28C0B}"/>
               </a:ext>
             </a:extLst>
           </p:cNvPr>
@@ -5214,7 +5214,7 @@
           <p:cNvPr id="20" name="">
             <a:extLst xmlns:a="http://schemas.openxmlformats.org/drawingml/2006/main">
               <a:ext uri="{FF2B5EF4-FFF2-40B4-BE49-F238E27FC236}">
-                <a16:creationId xmlns:a16="http://schemas.microsoft.com/office/drawing/2014/main" id="{C4B3B3CA-0625-4F6B-B588-25E06BE0620D}"/>
+                <a16:creationId xmlns:a16="http://schemas.microsoft.com/office/drawing/2014/main" id="{BB3F0092-0A78-47CE-A7E1-6D7EA65A84F9}"/>
               </a:ext>
             </a:extLst>
           </p:cNvPr>
@@ -5271,7 +5271,7 @@
           <p:cNvPr id="21" name="">
             <a:extLst xmlns:a="http://schemas.openxmlformats.org/drawingml/2006/main">
               <a:ext uri="{FF2B5EF4-FFF2-40B4-BE49-F238E27FC236}">
-                <a16:creationId xmlns:a16="http://schemas.microsoft.com/office/drawing/2014/main" id="{742358F7-C819-498F-8727-685F970DD746}"/>
+                <a16:creationId xmlns:a16="http://schemas.microsoft.com/office/drawing/2014/main" id="{248422FD-65EE-44C2-8E34-12B3DE8C61C4}"/>
               </a:ext>
             </a:extLst>
           </p:cNvPr>
@@ -5328,7 +5328,7 @@
           <p:cNvPr id="22" name="">
             <a:extLst xmlns:a="http://schemas.openxmlformats.org/drawingml/2006/main">
               <a:ext uri="{FF2B5EF4-FFF2-40B4-BE49-F238E27FC236}">
-                <a16:creationId xmlns:a16="http://schemas.microsoft.com/office/drawing/2014/main" id="{125308EF-96BF-4B59-A97E-6C9F90C1538D}"/>
+                <a16:creationId xmlns:a16="http://schemas.microsoft.com/office/drawing/2014/main" id="{6CAEDD2E-CDF3-4A98-837C-ED5FA3FA6F55}"/>
               </a:ext>
             </a:extLst>
           </p:cNvPr>
@@ -5383,7 +5383,7 @@
     </p:spTree>
     <p:extLst>
       <p:ext uri="{BB962C8B-B14F-4D97-AF65-F5344CB8AC3E}">
-        <p14:creationId xmlns:p14="http://schemas.microsoft.com/office/powerpoint/2010/main" val="886410870"/>
+        <p14:creationId xmlns:p14="http://schemas.microsoft.com/office/powerpoint/2010/main" val="1063434896"/>
       </p:ext>
     </p:extLst>
   </p:cSld>
@@ -5584,7 +5584,7 @@
           <p:cNvPr id="23" name="">
             <a:extLst xmlns:a="http://schemas.openxmlformats.org/drawingml/2006/main">
               <a:ext uri="{FF2B5EF4-FFF2-40B4-BE49-F238E27FC236}">
-                <a16:creationId xmlns:a16="http://schemas.microsoft.com/office/drawing/2014/main" id="{5D8802A9-716E-49A0-B60A-AB645AD299DC}"/>
+                <a16:creationId xmlns:a16="http://schemas.microsoft.com/office/drawing/2014/main" id="{28030D73-26EC-4BDD-AB54-435D5E9A0B5B}"/>
               </a:ext>
             </a:extLst>
           </p:cNvPr>
@@ -5616,7 +5616,7 @@
           <p:cNvPr id="2" name="">
             <a:extLst xmlns:a="http://schemas.openxmlformats.org/drawingml/2006/main">
               <a:ext uri="{FF2B5EF4-FFF2-40B4-BE49-F238E27FC236}">
-                <a16:creationId xmlns:a16="http://schemas.microsoft.com/office/drawing/2014/main" id="{026A81F7-B064-42F3-90D5-80A22971CD81}"/>
+                <a16:creationId xmlns:a16="http://schemas.microsoft.com/office/drawing/2014/main" id="{E908FACE-9F70-4342-989F-293622E0B22F}"/>
               </a:ext>
             </a:extLst>
           </p:cNvPr>
@@ -5673,7 +5673,7 @@
           <p:cNvPr id="3" name="">
             <a:extLst xmlns:a="http://schemas.openxmlformats.org/drawingml/2006/main">
               <a:ext uri="{FF2B5EF4-FFF2-40B4-BE49-F238E27FC236}">
-                <a16:creationId xmlns:a16="http://schemas.microsoft.com/office/drawing/2014/main" id="{A19AA820-B9A0-4F9D-AED8-A4B32E97F8DD}"/>
+                <a16:creationId xmlns:a16="http://schemas.microsoft.com/office/drawing/2014/main" id="{D73BED6C-A0D3-4F41-B976-B5039B387387}"/>
               </a:ext>
             </a:extLst>
           </p:cNvPr>
@@ -5705,7 +5705,7 @@
           <p:cNvPr id="4" name="">
             <a:extLst xmlns:a="http://schemas.openxmlformats.org/drawingml/2006/main">
               <a:ext uri="{FF2B5EF4-FFF2-40B4-BE49-F238E27FC236}">
-                <a16:creationId xmlns:a16="http://schemas.microsoft.com/office/drawing/2014/main" id="{E5A555FB-70AF-492A-BE1C-E94B1D9A69FE}"/>
+                <a16:creationId xmlns:a16="http://schemas.microsoft.com/office/drawing/2014/main" id="{51CF8AE1-02B6-434C-9A1B-02F93E5E580D}"/>
               </a:ext>
             </a:extLst>
           </p:cNvPr>
@@ -5762,7 +5762,7 @@
           <p:cNvPr id="5" name="">
             <a:extLst xmlns:a="http://schemas.openxmlformats.org/drawingml/2006/main">
               <a:ext uri="{FF2B5EF4-FFF2-40B4-BE49-F238E27FC236}">
-                <a16:creationId xmlns:a16="http://schemas.microsoft.com/office/drawing/2014/main" id="{53CEA20D-E6FD-466D-A40B-246C5B9C251A}"/>
+                <a16:creationId xmlns:a16="http://schemas.microsoft.com/office/drawing/2014/main" id="{CFCAC7F0-B028-44BE-BF20-9B954E9CFE6F}"/>
               </a:ext>
             </a:extLst>
           </p:cNvPr>
@@ -5819,7 +5819,7 @@
           <p:cNvPr id="6" name="">
             <a:extLst xmlns:a="http://schemas.openxmlformats.org/drawingml/2006/main">
               <a:ext uri="{FF2B5EF4-FFF2-40B4-BE49-F238E27FC236}">
-                <a16:creationId xmlns:a16="http://schemas.microsoft.com/office/drawing/2014/main" id="{F0E865CC-696E-4AB0-9B2D-C75C917081B6}"/>
+                <a16:creationId xmlns:a16="http://schemas.microsoft.com/office/drawing/2014/main" id="{7C31BFA5-D265-4821-AAFD-DC338BF92C54}"/>
               </a:ext>
             </a:extLst>
           </p:cNvPr>
@@ -5876,7 +5876,7 @@
           <p:cNvPr id="7" name="">
             <a:extLst xmlns:a="http://schemas.openxmlformats.org/drawingml/2006/main">
               <a:ext uri="{FF2B5EF4-FFF2-40B4-BE49-F238E27FC236}">
-                <a16:creationId xmlns:a16="http://schemas.microsoft.com/office/drawing/2014/main" id="{1DF3B8C2-7EB2-47FA-9ADE-BB09EDB61591}"/>
+                <a16:creationId xmlns:a16="http://schemas.microsoft.com/office/drawing/2014/main" id="{96EAF72D-EDB5-4AF1-8077-2D30101667EA}"/>
               </a:ext>
             </a:extLst>
           </p:cNvPr>
@@ -5908,7 +5908,7 @@
           <p:cNvPr id="8" name="">
             <a:extLst xmlns:a="http://schemas.openxmlformats.org/drawingml/2006/main">
               <a:ext uri="{FF2B5EF4-FFF2-40B4-BE49-F238E27FC236}">
-                <a16:creationId xmlns:a16="http://schemas.microsoft.com/office/drawing/2014/main" id="{F9F4F7FB-9D0D-4099-B1B4-E64AC86DDAF1}"/>
+                <a16:creationId xmlns:a16="http://schemas.microsoft.com/office/drawing/2014/main" id="{75A9C05A-D3E4-42C7-93DA-E94AFDA92972}"/>
               </a:ext>
             </a:extLst>
           </p:cNvPr>
@@ -5965,7 +5965,7 @@
           <p:cNvPr id="9" name="">
             <a:extLst xmlns:a="http://schemas.openxmlformats.org/drawingml/2006/main">
               <a:ext uri="{FF2B5EF4-FFF2-40B4-BE49-F238E27FC236}">
-                <a16:creationId xmlns:a16="http://schemas.microsoft.com/office/drawing/2014/main" id="{9B7BD0BC-8343-4214-B910-1B3D55B3C33B}"/>
+                <a16:creationId xmlns:a16="http://schemas.microsoft.com/office/drawing/2014/main" id="{68142CD3-97C5-488E-B36C-86E18E845B31}"/>
               </a:ext>
             </a:extLst>
           </p:cNvPr>
@@ -6022,7 +6022,7 @@
           <p:cNvPr id="10" name="">
             <a:extLst xmlns:a="http://schemas.openxmlformats.org/drawingml/2006/main">
               <a:ext uri="{FF2B5EF4-FFF2-40B4-BE49-F238E27FC236}">
-                <a16:creationId xmlns:a16="http://schemas.microsoft.com/office/drawing/2014/main" id="{AE978441-F643-4818-A8B0-8AA19B42C9FD}"/>
+                <a16:creationId xmlns:a16="http://schemas.microsoft.com/office/drawing/2014/main" id="{6D04777B-9F0F-467F-A678-94EA9254AE38}"/>
               </a:ext>
             </a:extLst>
           </p:cNvPr>
@@ -6056,7 +6056,7 @@
           <p:cNvPr id="11" name="">
             <a:extLst xmlns:a="http://schemas.openxmlformats.org/drawingml/2006/main">
               <a:ext uri="{FF2B5EF4-FFF2-40B4-BE49-F238E27FC236}">
-                <a16:creationId xmlns:a16="http://schemas.microsoft.com/office/drawing/2014/main" id="{40E6C8AB-EB81-4A14-B8A7-CDBF9F734A06}"/>
+                <a16:creationId xmlns:a16="http://schemas.microsoft.com/office/drawing/2014/main" id="{9070162A-657B-4181-936D-F6D8A3723C9D}"/>
               </a:ext>
             </a:extLst>
           </p:cNvPr>
@@ -6088,7 +6088,7 @@
           <p:cNvPr id="12" name="">
             <a:extLst xmlns:a="http://schemas.openxmlformats.org/drawingml/2006/main">
               <a:ext uri="{FF2B5EF4-FFF2-40B4-BE49-F238E27FC236}">
-                <a16:creationId xmlns:a16="http://schemas.microsoft.com/office/drawing/2014/main" id="{F112065E-5233-44E1-83EA-6DD2B4D43A32}"/>
+                <a16:creationId xmlns:a16="http://schemas.microsoft.com/office/drawing/2014/main" id="{347746CE-6D95-4825-8AF5-BDC46EE1F6F1}"/>
               </a:ext>
             </a:extLst>
           </p:cNvPr>
@@ -6145,7 +6145,7 @@
           <p:cNvPr id="13" name="">
             <a:extLst xmlns:a="http://schemas.openxmlformats.org/drawingml/2006/main">
               <a:ext uri="{FF2B5EF4-FFF2-40B4-BE49-F238E27FC236}">
-                <a16:creationId xmlns:a16="http://schemas.microsoft.com/office/drawing/2014/main" id="{58F09F79-FBB5-4E45-A75E-01C21181FE35}"/>
+                <a16:creationId xmlns:a16="http://schemas.microsoft.com/office/drawing/2014/main" id="{222D9800-2ED8-4B14-8CC2-0C171FB93359}"/>
               </a:ext>
             </a:extLst>
           </p:cNvPr>
@@ -6202,7 +6202,7 @@
           <p:cNvPr id="14" name="">
             <a:extLst xmlns:a="http://schemas.openxmlformats.org/drawingml/2006/main">
               <a:ext uri="{FF2B5EF4-FFF2-40B4-BE49-F238E27FC236}">
-                <a16:creationId xmlns:a16="http://schemas.microsoft.com/office/drawing/2014/main" id="{F0033E14-6519-479E-ACE8-7AF58346198F}"/>
+                <a16:creationId xmlns:a16="http://schemas.microsoft.com/office/drawing/2014/main" id="{D0ABB0A5-8AB7-45D6-8F51-A5CBA2BC3167}"/>
               </a:ext>
             </a:extLst>
           </p:cNvPr>
@@ -6236,7 +6236,7 @@
           <p:cNvPr id="15" name="">
             <a:extLst xmlns:a="http://schemas.openxmlformats.org/drawingml/2006/main">
               <a:ext uri="{FF2B5EF4-FFF2-40B4-BE49-F238E27FC236}">
-                <a16:creationId xmlns:a16="http://schemas.microsoft.com/office/drawing/2014/main" id="{7A6160DD-5CE0-40E3-B2BD-0F136934837A}"/>
+                <a16:creationId xmlns:a16="http://schemas.microsoft.com/office/drawing/2014/main" id="{5854749A-98CC-4532-A213-2AFC7BB5DE5A}"/>
               </a:ext>
             </a:extLst>
           </p:cNvPr>
@@ -6268,7 +6268,7 @@
           <p:cNvPr id="16" name="">
             <a:extLst xmlns:a="http://schemas.openxmlformats.org/drawingml/2006/main">
               <a:ext uri="{FF2B5EF4-FFF2-40B4-BE49-F238E27FC236}">
-                <a16:creationId xmlns:a16="http://schemas.microsoft.com/office/drawing/2014/main" id="{26976FFA-636E-4C8E-B774-883058734E0C}"/>
+                <a16:creationId xmlns:a16="http://schemas.microsoft.com/office/drawing/2014/main" id="{441E458A-2422-4C9D-981D-2CDB808D481B}"/>
               </a:ext>
             </a:extLst>
           </p:cNvPr>
@@ -6325,7 +6325,7 @@
           <p:cNvPr id="17" name="">
             <a:extLst xmlns:a="http://schemas.openxmlformats.org/drawingml/2006/main">
               <a:ext uri="{FF2B5EF4-FFF2-40B4-BE49-F238E27FC236}">
-                <a16:creationId xmlns:a16="http://schemas.microsoft.com/office/drawing/2014/main" id="{7698BA30-914A-443B-8678-A7A70F38A3B6}"/>
+                <a16:creationId xmlns:a16="http://schemas.microsoft.com/office/drawing/2014/main" id="{54C562E1-6CEE-40EC-8734-D2CCC4CF8BF9}"/>
               </a:ext>
             </a:extLst>
           </p:cNvPr>
@@ -6382,7 +6382,7 @@
           <p:cNvPr id="18" name="">
             <a:extLst xmlns:a="http://schemas.openxmlformats.org/drawingml/2006/main">
               <a:ext uri="{FF2B5EF4-FFF2-40B4-BE49-F238E27FC236}">
-                <a16:creationId xmlns:a16="http://schemas.microsoft.com/office/drawing/2014/main" id="{C0C776B0-1165-42E3-BA71-CC598D277E16}"/>
+                <a16:creationId xmlns:a16="http://schemas.microsoft.com/office/drawing/2014/main" id="{A0984505-F56C-435F-9D2E-D6C4C05C9131}"/>
               </a:ext>
             </a:extLst>
           </p:cNvPr>
@@ -6416,7 +6416,7 @@
           <p:cNvPr id="19" name="">
             <a:extLst xmlns:a="http://schemas.openxmlformats.org/drawingml/2006/main">
               <a:ext uri="{FF2B5EF4-FFF2-40B4-BE49-F238E27FC236}">
-                <a16:creationId xmlns:a16="http://schemas.microsoft.com/office/drawing/2014/main" id="{8B980945-AC49-464A-A767-11D14174352A}"/>
+                <a16:creationId xmlns:a16="http://schemas.microsoft.com/office/drawing/2014/main" id="{97DF6D6C-D8CB-4511-A462-C960AD92A316}"/>
               </a:ext>
             </a:extLst>
           </p:cNvPr>
@@ -6448,7 +6448,7 @@
           <p:cNvPr id="20" name="">
             <a:extLst xmlns:a="http://schemas.openxmlformats.org/drawingml/2006/main">
               <a:ext uri="{FF2B5EF4-FFF2-40B4-BE49-F238E27FC236}">
-                <a16:creationId xmlns:a16="http://schemas.microsoft.com/office/drawing/2014/main" id="{FEBEA23C-774B-4D07-9A1E-7621490F032F}"/>
+                <a16:creationId xmlns:a16="http://schemas.microsoft.com/office/drawing/2014/main" id="{F424A0DC-B936-4F46-BF8D-93DD2C9659F9}"/>
               </a:ext>
             </a:extLst>
           </p:cNvPr>
@@ -6505,7 +6505,7 @@
           <p:cNvPr id="21" name="">
             <a:extLst xmlns:a="http://schemas.openxmlformats.org/drawingml/2006/main">
               <a:ext uri="{FF2B5EF4-FFF2-40B4-BE49-F238E27FC236}">
-                <a16:creationId xmlns:a16="http://schemas.microsoft.com/office/drawing/2014/main" id="{4D3976C6-DB7D-4162-B5F2-4157495E80F9}"/>
+                <a16:creationId xmlns:a16="http://schemas.microsoft.com/office/drawing/2014/main" id="{647369F8-56F3-4C68-B24E-480D252646FF}"/>
               </a:ext>
             </a:extLst>
           </p:cNvPr>
@@ -6562,7 +6562,7 @@
           <p:cNvPr id="22" name="">
             <a:extLst xmlns:a="http://schemas.openxmlformats.org/drawingml/2006/main">
               <a:ext uri="{FF2B5EF4-FFF2-40B4-BE49-F238E27FC236}">
-                <a16:creationId xmlns:a16="http://schemas.microsoft.com/office/drawing/2014/main" id="{25A4C99E-B258-48A1-A89E-B852F7CDC3A9}"/>
+                <a16:creationId xmlns:a16="http://schemas.microsoft.com/office/drawing/2014/main" id="{D19B8155-D492-4726-AFBC-4ED0BC983594}"/>
               </a:ext>
             </a:extLst>
           </p:cNvPr>
@@ -6617,7 +6617,7 @@
     </p:spTree>
     <p:extLst>
       <p:ext uri="{BB962C8B-B14F-4D97-AF65-F5344CB8AC3E}">
-        <p14:creationId xmlns:p14="http://schemas.microsoft.com/office/powerpoint/2010/main" val="1736672302"/>
+        <p14:creationId xmlns:p14="http://schemas.microsoft.com/office/powerpoint/2010/main" val="276022751"/>
       </p:ext>
     </p:extLst>
   </p:cSld>
@@ -6818,7 +6818,7 @@
           <p:cNvPr id="16" name="">
             <a:extLst xmlns:a="http://schemas.openxmlformats.org/drawingml/2006/main">
               <a:ext uri="{FF2B5EF4-FFF2-40B4-BE49-F238E27FC236}">
-                <a16:creationId xmlns:a16="http://schemas.microsoft.com/office/drawing/2014/main" id="{59F162A1-A27B-4AC9-8BD3-2F41C41017A9}"/>
+                <a16:creationId xmlns:a16="http://schemas.microsoft.com/office/drawing/2014/main" id="{DEA5C95E-9A0D-41C0-99DF-C0E732986D87}"/>
               </a:ext>
             </a:extLst>
           </p:cNvPr>
@@ -6850,7 +6850,7 @@
           <p:cNvPr id="2" name="">
             <a:extLst xmlns:a="http://schemas.openxmlformats.org/drawingml/2006/main">
               <a:ext uri="{FF2B5EF4-FFF2-40B4-BE49-F238E27FC236}">
-                <a16:creationId xmlns:a16="http://schemas.microsoft.com/office/drawing/2014/main" id="{01AE457B-970F-419A-BE9D-4C6824D188E8}"/>
+                <a16:creationId xmlns:a16="http://schemas.microsoft.com/office/drawing/2014/main" id="{A8E188CE-3676-4006-8A18-9A054D6AA1A5}"/>
               </a:ext>
             </a:extLst>
           </p:cNvPr>
@@ -6907,7 +6907,7 @@
           <p:cNvPr id="3" name="">
             <a:extLst xmlns:a="http://schemas.openxmlformats.org/drawingml/2006/main">
               <a:ext uri="{FF2B5EF4-FFF2-40B4-BE49-F238E27FC236}">
-                <a16:creationId xmlns:a16="http://schemas.microsoft.com/office/drawing/2014/main" id="{A671DECC-83B3-44CE-8D13-7901388A5C95}"/>
+                <a16:creationId xmlns:a16="http://schemas.microsoft.com/office/drawing/2014/main" id="{B4121BD3-EAEE-4BA5-A5F0-A068E5EBD765}"/>
               </a:ext>
             </a:extLst>
           </p:cNvPr>
@@ -6939,7 +6939,7 @@
           <p:cNvPr id="4" name="">
             <a:extLst xmlns:a="http://schemas.openxmlformats.org/drawingml/2006/main">
               <a:ext uri="{FF2B5EF4-FFF2-40B4-BE49-F238E27FC236}">
-                <a16:creationId xmlns:a16="http://schemas.microsoft.com/office/drawing/2014/main" id="{FFFB6197-6CDD-43D8-B316-6D51DD778459}"/>
+                <a16:creationId xmlns:a16="http://schemas.microsoft.com/office/drawing/2014/main" id="{DFB1165A-D97D-47BC-9874-AAB93425D51D}"/>
               </a:ext>
             </a:extLst>
           </p:cNvPr>
@@ -6996,7 +6996,7 @@
           <p:cNvPr id="5" name="">
             <a:extLst xmlns:a="http://schemas.openxmlformats.org/drawingml/2006/main">
               <a:ext uri="{FF2B5EF4-FFF2-40B4-BE49-F238E27FC236}">
-                <a16:creationId xmlns:a16="http://schemas.microsoft.com/office/drawing/2014/main" id="{CCBA0CDB-740C-4056-858B-3EA9B79E7155}"/>
+                <a16:creationId xmlns:a16="http://schemas.microsoft.com/office/drawing/2014/main" id="{F15E127E-86CC-4C97-A879-B4178B52FAA8}"/>
               </a:ext>
             </a:extLst>
           </p:cNvPr>
@@ -7053,7 +7053,7 @@
           <p:cNvPr id="6" name="">
             <a:extLst xmlns:a="http://schemas.openxmlformats.org/drawingml/2006/main">
               <a:ext uri="{FF2B5EF4-FFF2-40B4-BE49-F238E27FC236}">
-                <a16:creationId xmlns:a16="http://schemas.microsoft.com/office/drawing/2014/main" id="{99501BCF-089C-4827-8BE5-DAD409E34222}"/>
+                <a16:creationId xmlns:a16="http://schemas.microsoft.com/office/drawing/2014/main" id="{C1E19D3D-E074-4950-9F44-A64914AA457F}"/>
               </a:ext>
             </a:extLst>
           </p:cNvPr>
@@ -7110,7 +7110,7 @@
           <p:cNvPr id="7" name="">
             <a:extLst xmlns:a="http://schemas.openxmlformats.org/drawingml/2006/main">
               <a:ext uri="{FF2B5EF4-FFF2-40B4-BE49-F238E27FC236}">
-                <a16:creationId xmlns:a16="http://schemas.microsoft.com/office/drawing/2014/main" id="{44DE2750-9E07-47B8-9032-8C6FC0D39F7B}"/>
+                <a16:creationId xmlns:a16="http://schemas.microsoft.com/office/drawing/2014/main" id="{698DD3EA-5AD9-43AD-B8E9-9DD8A86D581B}"/>
               </a:ext>
             </a:extLst>
           </p:cNvPr>
@@ -7142,7 +7142,7 @@
           <p:cNvPr id="8" name="">
             <a:extLst xmlns:a="http://schemas.openxmlformats.org/drawingml/2006/main">
               <a:ext uri="{FF2B5EF4-FFF2-40B4-BE49-F238E27FC236}">
-                <a16:creationId xmlns:a16="http://schemas.microsoft.com/office/drawing/2014/main" id="{291335C4-B79A-49AE-AC33-E1CCF719B921}"/>
+                <a16:creationId xmlns:a16="http://schemas.microsoft.com/office/drawing/2014/main" id="{0B997C8F-CD37-4F23-B39B-03E11DECE003}"/>
               </a:ext>
             </a:extLst>
           </p:cNvPr>
@@ -7199,7 +7199,7 @@
           <p:cNvPr id="9" name="">
             <a:extLst xmlns:a="http://schemas.openxmlformats.org/drawingml/2006/main">
               <a:ext uri="{FF2B5EF4-FFF2-40B4-BE49-F238E27FC236}">
-                <a16:creationId xmlns:a16="http://schemas.microsoft.com/office/drawing/2014/main" id="{D8CE26F4-9CE7-4EC3-A2FD-600C6742B7FD}"/>
+                <a16:creationId xmlns:a16="http://schemas.microsoft.com/office/drawing/2014/main" id="{009C303B-C8A9-4625-9F8C-B043AD6F8F6F}"/>
               </a:ext>
             </a:extLst>
           </p:cNvPr>
@@ -7256,7 +7256,7 @@
           <p:cNvPr id="10" name="">
             <a:extLst xmlns:a="http://schemas.openxmlformats.org/drawingml/2006/main">
               <a:ext uri="{FF2B5EF4-FFF2-40B4-BE49-F238E27FC236}">
-                <a16:creationId xmlns:a16="http://schemas.microsoft.com/office/drawing/2014/main" id="{5090D291-A074-4006-B3DF-C3C2E7DE46A6}"/>
+                <a16:creationId xmlns:a16="http://schemas.microsoft.com/office/drawing/2014/main" id="{1F7614F3-1DF9-43DE-8F37-A3EE57003F46}"/>
               </a:ext>
             </a:extLst>
           </p:cNvPr>
@@ -7313,7 +7313,7 @@
           <p:cNvPr id="11" name="">
             <a:extLst xmlns:a="http://schemas.openxmlformats.org/drawingml/2006/main">
               <a:ext uri="{FF2B5EF4-FFF2-40B4-BE49-F238E27FC236}">
-                <a16:creationId xmlns:a16="http://schemas.microsoft.com/office/drawing/2014/main" id="{B7314868-408C-48C5-815D-A44FCEC69690}"/>
+                <a16:creationId xmlns:a16="http://schemas.microsoft.com/office/drawing/2014/main" id="{FB8905E7-98A3-415D-A1D5-E555303889E5}"/>
               </a:ext>
             </a:extLst>
           </p:cNvPr>
@@ -7345,7 +7345,7 @@
           <p:cNvPr id="12" name="">
             <a:extLst xmlns:a="http://schemas.openxmlformats.org/drawingml/2006/main">
               <a:ext uri="{FF2B5EF4-FFF2-40B4-BE49-F238E27FC236}">
-                <a16:creationId xmlns:a16="http://schemas.microsoft.com/office/drawing/2014/main" id="{935181D7-29DE-4CA5-B4A3-D2161EDA8A70}"/>
+                <a16:creationId xmlns:a16="http://schemas.microsoft.com/office/drawing/2014/main" id="{4A80788A-F89D-4FEA-9D3B-F4332C256D08}"/>
               </a:ext>
             </a:extLst>
           </p:cNvPr>
@@ -7402,7 +7402,7 @@
           <p:cNvPr id="13" name="">
             <a:extLst xmlns:a="http://schemas.openxmlformats.org/drawingml/2006/main">
               <a:ext uri="{FF2B5EF4-FFF2-40B4-BE49-F238E27FC236}">
-                <a16:creationId xmlns:a16="http://schemas.microsoft.com/office/drawing/2014/main" id="{A465864A-DC7A-4A13-AF2F-FA9EDD43F813}"/>
+                <a16:creationId xmlns:a16="http://schemas.microsoft.com/office/drawing/2014/main" id="{C3B07F7E-4B09-4888-9CC0-D8FF7C0F3FBF}"/>
               </a:ext>
             </a:extLst>
           </p:cNvPr>
@@ -7459,7 +7459,7 @@
           <p:cNvPr id="14" name="">
             <a:extLst xmlns:a="http://schemas.openxmlformats.org/drawingml/2006/main">
               <a:ext uri="{FF2B5EF4-FFF2-40B4-BE49-F238E27FC236}">
-                <a16:creationId xmlns:a16="http://schemas.microsoft.com/office/drawing/2014/main" id="{C15C682C-2ABA-497F-82FD-DC9BC30D0D87}"/>
+                <a16:creationId xmlns:a16="http://schemas.microsoft.com/office/drawing/2014/main" id="{5417BB28-2675-4BEC-AC8C-300177536717}"/>
               </a:ext>
             </a:extLst>
           </p:cNvPr>
@@ -7516,7 +7516,7 @@
           <p:cNvPr id="15" name="">
             <a:extLst xmlns:a="http://schemas.openxmlformats.org/drawingml/2006/main">
               <a:ext uri="{FF2B5EF4-FFF2-40B4-BE49-F238E27FC236}">
-                <a16:creationId xmlns:a16="http://schemas.microsoft.com/office/drawing/2014/main" id="{564B0219-C28B-49DF-98CA-98E734783E8C}"/>
+                <a16:creationId xmlns:a16="http://schemas.microsoft.com/office/drawing/2014/main" id="{45E5EB86-6AEB-459A-9CC6-43318897AC01}"/>
               </a:ext>
             </a:extLst>
           </p:cNvPr>
@@ -7571,7 +7571,7 @@
     </p:spTree>
     <p:extLst>
       <p:ext uri="{BB962C8B-B14F-4D97-AF65-F5344CB8AC3E}">
-        <p14:creationId xmlns:p14="http://schemas.microsoft.com/office/powerpoint/2010/main" val="1128340055"/>
+        <p14:creationId xmlns:p14="http://schemas.microsoft.com/office/powerpoint/2010/main" val="1763538702"/>
       </p:ext>
     </p:extLst>
   </p:cSld>
@@ -7772,7 +7772,7 @@
           <p:cNvPr id="23" name="">
             <a:extLst xmlns:a="http://schemas.openxmlformats.org/drawingml/2006/main">
               <a:ext uri="{FF2B5EF4-FFF2-40B4-BE49-F238E27FC236}">
-                <a16:creationId xmlns:a16="http://schemas.microsoft.com/office/drawing/2014/main" id="{0382E8B3-CB65-41CF-AFC0-03E077788BF2}"/>
+                <a16:creationId xmlns:a16="http://schemas.microsoft.com/office/drawing/2014/main" id="{2D24FDB7-EA38-4FB9-BB43-AF71F96CFEFE}"/>
               </a:ext>
             </a:extLst>
           </p:cNvPr>
@@ -7804,7 +7804,7 @@
           <p:cNvPr id="2" name="">
             <a:extLst xmlns:a="http://schemas.openxmlformats.org/drawingml/2006/main">
               <a:ext uri="{FF2B5EF4-FFF2-40B4-BE49-F238E27FC236}">
-                <a16:creationId xmlns:a16="http://schemas.microsoft.com/office/drawing/2014/main" id="{A604B561-58FE-48C5-853F-5F6574E4BF36}"/>
+                <a16:creationId xmlns:a16="http://schemas.microsoft.com/office/drawing/2014/main" id="{7A4AFAB7-6A07-4971-94F3-5E65F5EC5303}"/>
               </a:ext>
             </a:extLst>
           </p:cNvPr>
@@ -7861,7 +7861,7 @@
           <p:cNvPr id="3" name="">
             <a:extLst xmlns:a="http://schemas.openxmlformats.org/drawingml/2006/main">
               <a:ext uri="{FF2B5EF4-FFF2-40B4-BE49-F238E27FC236}">
-                <a16:creationId xmlns:a16="http://schemas.microsoft.com/office/drawing/2014/main" id="{73DDE0F6-F8D7-4EED-B92A-73F61ED4A16F}"/>
+                <a16:creationId xmlns:a16="http://schemas.microsoft.com/office/drawing/2014/main" id="{231BD8EF-820E-4F1C-936A-694DFAA40642}"/>
               </a:ext>
             </a:extLst>
           </p:cNvPr>
@@ -7893,7 +7893,7 @@
           <p:cNvPr id="4" name="">
             <a:extLst xmlns:a="http://schemas.openxmlformats.org/drawingml/2006/main">
               <a:ext uri="{FF2B5EF4-FFF2-40B4-BE49-F238E27FC236}">
-                <a16:creationId xmlns:a16="http://schemas.microsoft.com/office/drawing/2014/main" id="{FE82878D-834C-43D5-A486-DDF3E6698411}"/>
+                <a16:creationId xmlns:a16="http://schemas.microsoft.com/office/drawing/2014/main" id="{CCEE337A-D98D-4F1D-A22E-5D7032F4FA76}"/>
               </a:ext>
             </a:extLst>
           </p:cNvPr>
@@ -7950,7 +7950,7 @@
           <p:cNvPr id="5" name="">
             <a:extLst xmlns:a="http://schemas.openxmlformats.org/drawingml/2006/main">
               <a:ext uri="{FF2B5EF4-FFF2-40B4-BE49-F238E27FC236}">
-                <a16:creationId xmlns:a16="http://schemas.microsoft.com/office/drawing/2014/main" id="{7D2CAC11-A386-4149-AC9F-2984CE94B929}"/>
+                <a16:creationId xmlns:a16="http://schemas.microsoft.com/office/drawing/2014/main" id="{542F1705-B23B-4F58-B3FD-DE91D907CCDE}"/>
               </a:ext>
             </a:extLst>
           </p:cNvPr>
@@ -8007,7 +8007,7 @@
           <p:cNvPr id="6" name="">
             <a:extLst xmlns:a="http://schemas.openxmlformats.org/drawingml/2006/main">
               <a:ext uri="{FF2B5EF4-FFF2-40B4-BE49-F238E27FC236}">
-                <a16:creationId xmlns:a16="http://schemas.microsoft.com/office/drawing/2014/main" id="{401818BB-0E50-479F-A6C1-9615902BC295}"/>
+                <a16:creationId xmlns:a16="http://schemas.microsoft.com/office/drawing/2014/main" id="{285FCCB6-B3C0-4658-B86A-9D8864CE44A8}"/>
               </a:ext>
             </a:extLst>
           </p:cNvPr>
@@ -8064,7 +8064,7 @@
           <p:cNvPr id="7" name="">
             <a:extLst xmlns:a="http://schemas.openxmlformats.org/drawingml/2006/main">
               <a:ext uri="{FF2B5EF4-FFF2-40B4-BE49-F238E27FC236}">
-                <a16:creationId xmlns:a16="http://schemas.microsoft.com/office/drawing/2014/main" id="{13D2A9DC-49D1-4E3B-BE47-D74CBC74428F}"/>
+                <a16:creationId xmlns:a16="http://schemas.microsoft.com/office/drawing/2014/main" id="{C213FEEC-D055-44F1-BB7A-C84F4C587A90}"/>
               </a:ext>
             </a:extLst>
           </p:cNvPr>
@@ -8096,7 +8096,7 @@
           <p:cNvPr id="8" name="">
             <a:extLst xmlns:a="http://schemas.openxmlformats.org/drawingml/2006/main">
               <a:ext uri="{FF2B5EF4-FFF2-40B4-BE49-F238E27FC236}">
-                <a16:creationId xmlns:a16="http://schemas.microsoft.com/office/drawing/2014/main" id="{56B11287-524F-44F7-8A4A-ED017B46F849}"/>
+                <a16:creationId xmlns:a16="http://schemas.microsoft.com/office/drawing/2014/main" id="{A5367A0F-49E9-4578-80BB-43C3C5F86C5E}"/>
               </a:ext>
             </a:extLst>
           </p:cNvPr>
@@ -8153,7 +8153,7 @@
           <p:cNvPr id="9" name="">
             <a:extLst xmlns:a="http://schemas.openxmlformats.org/drawingml/2006/main">
               <a:ext uri="{FF2B5EF4-FFF2-40B4-BE49-F238E27FC236}">
-                <a16:creationId xmlns:a16="http://schemas.microsoft.com/office/drawing/2014/main" id="{D0AF28A8-B5D0-4BF4-BDBE-50D921B08FEB}"/>
+                <a16:creationId xmlns:a16="http://schemas.microsoft.com/office/drawing/2014/main" id="{7259A5E9-43F8-4AE8-9E02-44D10730A5A8}"/>
               </a:ext>
             </a:extLst>
           </p:cNvPr>
@@ -8210,19 +8210,19 @@
           <p:cNvPr id="10" name="">
             <a:extLst xmlns:a="http://schemas.openxmlformats.org/drawingml/2006/main">
               <a:ext uri="{FF2B5EF4-FFF2-40B4-BE49-F238E27FC236}">
-                <a16:creationId xmlns:a16="http://schemas.microsoft.com/office/drawing/2014/main" id="{D20B252F-532E-498B-9DEF-CD86EC85F185}"/>
-              </a:ext>
-            </a:extLst>
-          </p:cNvPr>
-          <p:cNvSpPr>
-            <a:spLocks xmlns:a="http://schemas.openxmlformats.org/drawingml/2006/main" noGrp="1"/>
-          </p:cNvSpPr>
-          <p:nvPr/>
-        </p:nvSpPr>
-        <p:spPr>
-          <a:xfrm xmlns:a="http://schemas.openxmlformats.org/drawingml/2006/main">
-            <a:off x="914400" y="1257300"/>
-            <a:ext cx="10363200" cy="781050"/>
+                <a16:creationId xmlns:a16="http://schemas.microsoft.com/office/drawing/2014/main" id="{4DC8B512-DFC1-4B29-92A8-E38A0EF7BC02}"/>
+              </a:ext>
+            </a:extLst>
+          </p:cNvPr>
+          <p:cNvSpPr>
+            <a:spLocks xmlns:a="http://schemas.openxmlformats.org/drawingml/2006/main" noGrp="1"/>
+          </p:cNvSpPr>
+          <p:nvPr/>
+        </p:nvSpPr>
+        <p:spPr>
+          <a:xfrm xmlns:a="http://schemas.openxmlformats.org/drawingml/2006/main">
+            <a:off x="857250" y="1219200"/>
+            <a:ext cx="10477500" cy="742950"/>
           </a:xfrm>
           <a:prstGeom xmlns:a="http://schemas.openxmlformats.org/drawingml/2006/main" prst="rect">
             <a:avLst/>
@@ -8239,7 +8239,7 @@
           <a:lstStyle xmlns:a="http://schemas.openxmlformats.org/drawingml/2006/main"/>
           <a:p xmlns:a="http://schemas.openxmlformats.org/drawingml/2006/main">
             <a:pPr algn="ctr">
-              <a:defRPr sz="2175" b="1">
+              <a:defRPr sz="2100" b="1">
                 <a:solidFill>
                   <a:srgbClr val="17253A"/>
                 </a:solidFill>
@@ -8249,7 +8249,7 @@
               </a:defRPr>
             </a:pPr>
             <a:r>
-              <a:rPr sz="2175" b="1">
+              <a:rPr sz="2100" b="1">
                 <a:solidFill>
                   <a:srgbClr val="17253A"/>
                 </a:solidFill>
@@ -8267,28 +8267,30 @@
           <p:cNvPr id="11" name="">
             <a:extLst xmlns:a="http://schemas.openxmlformats.org/drawingml/2006/main">
               <a:ext uri="{FF2B5EF4-FFF2-40B4-BE49-F238E27FC236}">
-                <a16:creationId xmlns:a16="http://schemas.microsoft.com/office/drawing/2014/main" id="{4F57AEE8-5683-4CC5-B261-5B0FF3591EFA}"/>
-              </a:ext>
-            </a:extLst>
-          </p:cNvPr>
-          <p:cNvSpPr>
-            <a:spLocks xmlns:a="http://schemas.openxmlformats.org/drawingml/2006/main" noGrp="1"/>
-          </p:cNvSpPr>
-          <p:nvPr/>
-        </p:nvSpPr>
-        <p:spPr>
-          <a:xfrm xmlns:a="http://schemas.openxmlformats.org/drawingml/2006/main">
-            <a:off x="1000125" y="2247900"/>
-            <a:ext cx="476250" cy="476250"/>
-          </a:xfrm>
-          <a:prstGeom xmlns:a="http://schemas.openxmlformats.org/drawingml/2006/main" prst="ellipse">
+                <a16:creationId xmlns:a16="http://schemas.microsoft.com/office/drawing/2014/main" id="{4173534E-6FB8-4BB0-9187-84A89429D711}"/>
+              </a:ext>
+            </a:extLst>
+          </p:cNvPr>
+          <p:cNvSpPr>
+            <a:spLocks xmlns:a="http://schemas.openxmlformats.org/drawingml/2006/main" noGrp="1"/>
+          </p:cNvSpPr>
+          <p:nvPr/>
+        </p:nvSpPr>
+        <p:spPr>
+          <a:xfrm xmlns:a="http://schemas.openxmlformats.org/drawingml/2006/main">
+            <a:off x="971550" y="2124075"/>
+            <a:ext cx="38100" cy="3524250"/>
+          </a:xfrm>
+          <a:prstGeom xmlns:a="http://schemas.openxmlformats.org/drawingml/2006/main" prst="rect">
             <a:avLst/>
           </a:prstGeom>
           <a:solidFill xmlns:a="http://schemas.openxmlformats.org/drawingml/2006/main">
-            <a:srgbClr val="18324A"/>
+            <a:srgbClr val="2C6E73"/>
           </a:solidFill>
           <a:ln xmlns:a="http://schemas.openxmlformats.org/drawingml/2006/main" w="0">
-            <a:noFill/>
+            <a:solidFill>
+              <a:srgbClr val="2C6E73"/>
+            </a:solidFill>
           </a:ln>
         </p:spPr>
       </p:sp>
@@ -8297,19 +8299,19 @@
           <p:cNvPr id="12" name="">
             <a:extLst xmlns:a="http://schemas.openxmlformats.org/drawingml/2006/main">
               <a:ext uri="{FF2B5EF4-FFF2-40B4-BE49-F238E27FC236}">
-                <a16:creationId xmlns:a16="http://schemas.microsoft.com/office/drawing/2014/main" id="{F786D123-8812-4243-BC0C-95A40FEC4F64}"/>
-              </a:ext>
-            </a:extLst>
-          </p:cNvPr>
-          <p:cNvSpPr>
-            <a:spLocks xmlns:a="http://schemas.openxmlformats.org/drawingml/2006/main" noGrp="1"/>
-          </p:cNvSpPr>
-          <p:nvPr/>
-        </p:nvSpPr>
-        <p:spPr>
-          <a:xfrm xmlns:a="http://schemas.openxmlformats.org/drawingml/2006/main">
-            <a:off x="1000125" y="2276475"/>
-            <a:ext cx="476250" cy="419100"/>
+                <a16:creationId xmlns:a16="http://schemas.microsoft.com/office/drawing/2014/main" id="{B52C46AE-C76A-4709-A753-42C181B0A841}"/>
+              </a:ext>
+            </a:extLst>
+          </p:cNvPr>
+          <p:cNvSpPr>
+            <a:spLocks xmlns:a="http://schemas.openxmlformats.org/drawingml/2006/main" noGrp="1"/>
+          </p:cNvSpPr>
+          <p:nvPr/>
+        </p:nvSpPr>
+        <p:spPr>
+          <a:xfrm xmlns:a="http://schemas.openxmlformats.org/drawingml/2006/main">
+            <a:off x="1162050" y="2200275"/>
+            <a:ext cx="400050" cy="400050"/>
           </a:xfrm>
           <a:prstGeom xmlns:a="http://schemas.openxmlformats.org/drawingml/2006/main" prst="rect">
             <a:avLst/>
@@ -8326,9 +8328,9 @@
           <a:lstStyle xmlns:a="http://schemas.openxmlformats.org/drawingml/2006/main"/>
           <a:p xmlns:a="http://schemas.openxmlformats.org/drawingml/2006/main">
             <a:pPr algn="ctr">
-              <a:defRPr sz="1350" b="1">
-                <a:solidFill>
-                  <a:srgbClr val="FFFFFF"/>
+              <a:defRPr sz="1125" b="1">
+                <a:solidFill>
+                  <a:srgbClr val="2C6E73"/>
                 </a:solidFill>
                 <a:latin typeface="Arial"/>
                 <a:ea typeface="Arial"/>
@@ -8336,9 +8338,9 @@
               </a:defRPr>
             </a:pPr>
             <a:r>
-              <a:rPr sz="1350" b="1">
-                <a:solidFill>
-                  <a:srgbClr val="FFFFFF"/>
+              <a:rPr sz="1125" b="1">
+                <a:solidFill>
+                  <a:srgbClr val="2C6E73"/>
                 </a:solidFill>
                 <a:latin typeface="Arial"/>
                 <a:ea typeface="Arial"/>
@@ -8354,19 +8356,19 @@
           <p:cNvPr id="13" name="">
             <a:extLst xmlns:a="http://schemas.openxmlformats.org/drawingml/2006/main">
               <a:ext uri="{FF2B5EF4-FFF2-40B4-BE49-F238E27FC236}">
-                <a16:creationId xmlns:a16="http://schemas.microsoft.com/office/drawing/2014/main" id="{805952ED-23F8-4D2A-BCA2-1D156B2BB047}"/>
-              </a:ext>
-            </a:extLst>
-          </p:cNvPr>
-          <p:cNvSpPr>
-            <a:spLocks xmlns:a="http://schemas.openxmlformats.org/drawingml/2006/main" noGrp="1"/>
-          </p:cNvSpPr>
-          <p:nvPr/>
-        </p:nvSpPr>
-        <p:spPr>
-          <a:xfrm xmlns:a="http://schemas.openxmlformats.org/drawingml/2006/main">
-            <a:off x="1714500" y="2181225"/>
-            <a:ext cx="9429750" cy="609600"/>
+                <a16:creationId xmlns:a16="http://schemas.microsoft.com/office/drawing/2014/main" id="{4B583F7B-22BC-4E8B-945A-BA95DEC8F2E2}"/>
+              </a:ext>
+            </a:extLst>
+          </p:cNvPr>
+          <p:cNvSpPr>
+            <a:spLocks xmlns:a="http://schemas.openxmlformats.org/drawingml/2006/main" noGrp="1"/>
+          </p:cNvSpPr>
+          <p:nvPr/>
+        </p:nvSpPr>
+        <p:spPr>
+          <a:xfrm xmlns:a="http://schemas.openxmlformats.org/drawingml/2006/main">
+            <a:off x="1714500" y="2114550"/>
+            <a:ext cx="9525000" cy="809625"/>
           </a:xfrm>
           <a:prstGeom xmlns:a="http://schemas.openxmlformats.org/drawingml/2006/main" prst="rect">
             <a:avLst/>
@@ -8383,7 +8385,7 @@
           <a:lstStyle xmlns:a="http://schemas.openxmlformats.org/drawingml/2006/main"/>
           <a:p xmlns:a="http://schemas.openxmlformats.org/drawingml/2006/main">
             <a:pPr algn="l">
-              <a:defRPr sz="1500" b="0">
+              <a:defRPr sz="1725" b="0">
                 <a:solidFill>
                   <a:srgbClr val="17253A"/>
                 </a:solidFill>
@@ -8393,7 +8395,7 @@
               </a:defRPr>
             </a:pPr>
             <a:r>
-              <a:rPr sz="1500" b="0">
+              <a:rPr sz="1725" b="0">
                 <a:solidFill>
                   <a:srgbClr val="17253A"/>
                 </a:solidFill>
@@ -8401,7 +8403,7 @@
                 <a:ea typeface="Arial"/>
                 <a:cs typeface="Arial"/>
               </a:rPr>
-              <a:t>Identify the structure: Find a useful percentage such as 10%, 5% or 1%.</a:t>
+              <a:t>84 is 35% of a number</a:t>
             </a:r>
           </a:p>
         </p:txBody>
@@ -8411,28 +8413,30 @@
           <p:cNvPr id="14" name="">
             <a:extLst xmlns:a="http://schemas.openxmlformats.org/drawingml/2006/main">
               <a:ext uri="{FF2B5EF4-FFF2-40B4-BE49-F238E27FC236}">
-                <a16:creationId xmlns:a16="http://schemas.microsoft.com/office/drawing/2014/main" id="{7C84C243-1841-4291-9044-CD8E24EE6931}"/>
-              </a:ext>
-            </a:extLst>
-          </p:cNvPr>
-          <p:cNvSpPr>
-            <a:spLocks xmlns:a="http://schemas.openxmlformats.org/drawingml/2006/main" noGrp="1"/>
-          </p:cNvSpPr>
-          <p:nvPr/>
-        </p:nvSpPr>
-        <p:spPr>
-          <a:xfrm xmlns:a="http://schemas.openxmlformats.org/drawingml/2006/main">
-            <a:off x="1000125" y="2990850"/>
-            <a:ext cx="476250" cy="476250"/>
-          </a:xfrm>
-          <a:prstGeom xmlns:a="http://schemas.openxmlformats.org/drawingml/2006/main" prst="ellipse">
+                <a16:creationId xmlns:a16="http://schemas.microsoft.com/office/drawing/2014/main" id="{1C34A540-9465-4825-A99A-6D9449E332AF}"/>
+              </a:ext>
+            </a:extLst>
+          </p:cNvPr>
+          <p:cNvSpPr>
+            <a:spLocks xmlns:a="http://schemas.openxmlformats.org/drawingml/2006/main" noGrp="1"/>
+          </p:cNvSpPr>
+          <p:nvPr/>
+        </p:nvSpPr>
+        <p:spPr>
+          <a:xfrm xmlns:a="http://schemas.openxmlformats.org/drawingml/2006/main">
+            <a:off x="1714500" y="2943225"/>
+            <a:ext cx="9334500" cy="9525"/>
+          </a:xfrm>
+          <a:prstGeom xmlns:a="http://schemas.openxmlformats.org/drawingml/2006/main" prst="rect">
             <a:avLst/>
           </a:prstGeom>
           <a:solidFill xmlns:a="http://schemas.openxmlformats.org/drawingml/2006/main">
-            <a:srgbClr val="2C6E73"/>
+            <a:srgbClr val="D9E0E6"/>
           </a:solidFill>
           <a:ln xmlns:a="http://schemas.openxmlformats.org/drawingml/2006/main" w="0">
-            <a:noFill/>
+            <a:solidFill>
+              <a:srgbClr val="D9E0E6"/>
+            </a:solidFill>
           </a:ln>
         </p:spPr>
       </p:sp>
@@ -8441,19 +8445,19 @@
           <p:cNvPr id="15" name="">
             <a:extLst xmlns:a="http://schemas.openxmlformats.org/drawingml/2006/main">
               <a:ext uri="{FF2B5EF4-FFF2-40B4-BE49-F238E27FC236}">
-                <a16:creationId xmlns:a16="http://schemas.microsoft.com/office/drawing/2014/main" id="{856077D1-4029-4037-AED2-7AA1EBACC7EF}"/>
-              </a:ext>
-            </a:extLst>
-          </p:cNvPr>
-          <p:cNvSpPr>
-            <a:spLocks xmlns:a="http://schemas.openxmlformats.org/drawingml/2006/main" noGrp="1"/>
-          </p:cNvSpPr>
-          <p:nvPr/>
-        </p:nvSpPr>
-        <p:spPr>
-          <a:xfrm xmlns:a="http://schemas.openxmlformats.org/drawingml/2006/main">
-            <a:off x="1000125" y="3019425"/>
-            <a:ext cx="476250" cy="419100"/>
+                <a16:creationId xmlns:a16="http://schemas.microsoft.com/office/drawing/2014/main" id="{FAEB8DD9-FADA-4BAE-88C9-8D9785140A5B}"/>
+              </a:ext>
+            </a:extLst>
+          </p:cNvPr>
+          <p:cNvSpPr>
+            <a:spLocks xmlns:a="http://schemas.openxmlformats.org/drawingml/2006/main" noGrp="1"/>
+          </p:cNvSpPr>
+          <p:nvPr/>
+        </p:nvSpPr>
+        <p:spPr>
+          <a:xfrm xmlns:a="http://schemas.openxmlformats.org/drawingml/2006/main">
+            <a:off x="1162050" y="3076575"/>
+            <a:ext cx="400050" cy="400050"/>
           </a:xfrm>
           <a:prstGeom xmlns:a="http://schemas.openxmlformats.org/drawingml/2006/main" prst="rect">
             <a:avLst/>
@@ -8470,9 +8474,9 @@
           <a:lstStyle xmlns:a="http://schemas.openxmlformats.org/drawingml/2006/main"/>
           <a:p xmlns:a="http://schemas.openxmlformats.org/drawingml/2006/main">
             <a:pPr algn="ctr">
-              <a:defRPr sz="1350" b="1">
-                <a:solidFill>
-                  <a:srgbClr val="FFFFFF"/>
+              <a:defRPr sz="1125" b="1">
+                <a:solidFill>
+                  <a:srgbClr val="2C6E73"/>
                 </a:solidFill>
                 <a:latin typeface="Arial"/>
                 <a:ea typeface="Arial"/>
@@ -8480,9 +8484,9 @@
               </a:defRPr>
             </a:pPr>
             <a:r>
-              <a:rPr sz="1350" b="1">
-                <a:solidFill>
-                  <a:srgbClr val="FFFFFF"/>
+              <a:rPr sz="1125" b="1">
+                <a:solidFill>
+                  <a:srgbClr val="2C6E73"/>
                 </a:solidFill>
                 <a:latin typeface="Arial"/>
                 <a:ea typeface="Arial"/>
@@ -8498,19 +8502,19 @@
           <p:cNvPr id="16" name="">
             <a:extLst xmlns:a="http://schemas.openxmlformats.org/drawingml/2006/main">
               <a:ext uri="{FF2B5EF4-FFF2-40B4-BE49-F238E27FC236}">
-                <a16:creationId xmlns:a16="http://schemas.microsoft.com/office/drawing/2014/main" id="{0D9CE968-43B3-4682-82E2-C45CBEB274A6}"/>
-              </a:ext>
-            </a:extLst>
-          </p:cNvPr>
-          <p:cNvSpPr>
-            <a:spLocks xmlns:a="http://schemas.openxmlformats.org/drawingml/2006/main" noGrp="1"/>
-          </p:cNvSpPr>
-          <p:nvPr/>
-        </p:nvSpPr>
-        <p:spPr>
-          <a:xfrm xmlns:a="http://schemas.openxmlformats.org/drawingml/2006/main">
-            <a:off x="1714500" y="2924175"/>
-            <a:ext cx="9429750" cy="609600"/>
+                <a16:creationId xmlns:a16="http://schemas.microsoft.com/office/drawing/2014/main" id="{77761A08-CDB3-472E-90F8-826C7B829F1D}"/>
+              </a:ext>
+            </a:extLst>
+          </p:cNvPr>
+          <p:cNvSpPr>
+            <a:spLocks xmlns:a="http://schemas.openxmlformats.org/drawingml/2006/main" noGrp="1"/>
+          </p:cNvSpPr>
+          <p:nvPr/>
+        </p:nvSpPr>
+        <p:spPr>
+          <a:xfrm xmlns:a="http://schemas.openxmlformats.org/drawingml/2006/main">
+            <a:off x="1714500" y="2990850"/>
+            <a:ext cx="9525000" cy="809625"/>
           </a:xfrm>
           <a:prstGeom xmlns:a="http://schemas.openxmlformats.org/drawingml/2006/main" prst="rect">
             <a:avLst/>
@@ -8527,7 +8531,7 @@
           <a:lstStyle xmlns:a="http://schemas.openxmlformats.org/drawingml/2006/main"/>
           <a:p xmlns:a="http://schemas.openxmlformats.org/drawingml/2006/main">
             <a:pPr algn="l">
-              <a:defRPr sz="1500" b="0">
+              <a:defRPr sz="1725" b="0">
                 <a:solidFill>
                   <a:srgbClr val="17253A"/>
                 </a:solidFill>
@@ -8537,7 +8541,7 @@
               </a:defRPr>
             </a:pPr>
             <a:r>
-              <a:rPr sz="1500" b="0">
+              <a:rPr sz="1725" b="0">
                 <a:solidFill>
                   <a:srgbClr val="17253A"/>
                 </a:solidFill>
@@ -8545,7 +8549,7 @@
                 <a:ea typeface="Arial"/>
                 <a:cs typeface="Arial"/>
               </a:rPr>
-              <a:t>Set up the method: Combine or scale the known percentage to reach the required value.</a:t>
+              <a:t>5% = 84 ÷ 7 = 12</a:t>
             </a:r>
           </a:p>
         </p:txBody>
@@ -8555,28 +8559,30 @@
           <p:cNvPr id="17" name="">
             <a:extLst xmlns:a="http://schemas.openxmlformats.org/drawingml/2006/main">
               <a:ext uri="{FF2B5EF4-FFF2-40B4-BE49-F238E27FC236}">
-                <a16:creationId xmlns:a16="http://schemas.microsoft.com/office/drawing/2014/main" id="{95E7E97F-A636-4833-A880-CC82CEF1D4C7}"/>
-              </a:ext>
-            </a:extLst>
-          </p:cNvPr>
-          <p:cNvSpPr>
-            <a:spLocks xmlns:a="http://schemas.openxmlformats.org/drawingml/2006/main" noGrp="1"/>
-          </p:cNvSpPr>
-          <p:nvPr/>
-        </p:nvSpPr>
-        <p:spPr>
-          <a:xfrm xmlns:a="http://schemas.openxmlformats.org/drawingml/2006/main">
-            <a:off x="1000125" y="3733800"/>
-            <a:ext cx="476250" cy="476250"/>
-          </a:xfrm>
-          <a:prstGeom xmlns:a="http://schemas.openxmlformats.org/drawingml/2006/main" prst="ellipse">
+                <a16:creationId xmlns:a16="http://schemas.microsoft.com/office/drawing/2014/main" id="{616BDCB0-E252-445A-9EE3-20FFFD2906B8}"/>
+              </a:ext>
+            </a:extLst>
+          </p:cNvPr>
+          <p:cNvSpPr>
+            <a:spLocks xmlns:a="http://schemas.openxmlformats.org/drawingml/2006/main" noGrp="1"/>
+          </p:cNvSpPr>
+          <p:nvPr/>
+        </p:nvSpPr>
+        <p:spPr>
+          <a:xfrm xmlns:a="http://schemas.openxmlformats.org/drawingml/2006/main">
+            <a:off x="1714500" y="3819525"/>
+            <a:ext cx="9334500" cy="9525"/>
+          </a:xfrm>
+          <a:prstGeom xmlns:a="http://schemas.openxmlformats.org/drawingml/2006/main" prst="rect">
             <a:avLst/>
           </a:prstGeom>
           <a:solidFill xmlns:a="http://schemas.openxmlformats.org/drawingml/2006/main">
-            <a:srgbClr val="2C6E73"/>
+            <a:srgbClr val="D9E0E6"/>
           </a:solidFill>
           <a:ln xmlns:a="http://schemas.openxmlformats.org/drawingml/2006/main" w="0">
-            <a:noFill/>
+            <a:solidFill>
+              <a:srgbClr val="D9E0E6"/>
+            </a:solidFill>
           </a:ln>
         </p:spPr>
       </p:sp>
@@ -8585,19 +8591,19 @@
           <p:cNvPr id="18" name="">
             <a:extLst xmlns:a="http://schemas.openxmlformats.org/drawingml/2006/main">
               <a:ext uri="{FF2B5EF4-FFF2-40B4-BE49-F238E27FC236}">
-                <a16:creationId xmlns:a16="http://schemas.microsoft.com/office/drawing/2014/main" id="{AE5BBE22-1132-424F-AE96-162156847E31}"/>
-              </a:ext>
-            </a:extLst>
-          </p:cNvPr>
-          <p:cNvSpPr>
-            <a:spLocks xmlns:a="http://schemas.openxmlformats.org/drawingml/2006/main" noGrp="1"/>
-          </p:cNvSpPr>
-          <p:nvPr/>
-        </p:nvSpPr>
-        <p:spPr>
-          <a:xfrm xmlns:a="http://schemas.openxmlformats.org/drawingml/2006/main">
-            <a:off x="1000125" y="3762375"/>
-            <a:ext cx="476250" cy="419100"/>
+                <a16:creationId xmlns:a16="http://schemas.microsoft.com/office/drawing/2014/main" id="{A17D5BA0-3B23-46D4-A591-5261AD6F5A6F}"/>
+              </a:ext>
+            </a:extLst>
+          </p:cNvPr>
+          <p:cNvSpPr>
+            <a:spLocks xmlns:a="http://schemas.openxmlformats.org/drawingml/2006/main" noGrp="1"/>
+          </p:cNvSpPr>
+          <p:nvPr/>
+        </p:nvSpPr>
+        <p:spPr>
+          <a:xfrm xmlns:a="http://schemas.openxmlformats.org/drawingml/2006/main">
+            <a:off x="1162050" y="3952875"/>
+            <a:ext cx="400050" cy="400050"/>
           </a:xfrm>
           <a:prstGeom xmlns:a="http://schemas.openxmlformats.org/drawingml/2006/main" prst="rect">
             <a:avLst/>
@@ -8614,9 +8620,9 @@
           <a:lstStyle xmlns:a="http://schemas.openxmlformats.org/drawingml/2006/main"/>
           <a:p xmlns:a="http://schemas.openxmlformats.org/drawingml/2006/main">
             <a:pPr algn="ctr">
-              <a:defRPr sz="1350" b="1">
-                <a:solidFill>
-                  <a:srgbClr val="FFFFFF"/>
+              <a:defRPr sz="1125" b="1">
+                <a:solidFill>
+                  <a:srgbClr val="2C6E73"/>
                 </a:solidFill>
                 <a:latin typeface="Arial"/>
                 <a:ea typeface="Arial"/>
@@ -8624,9 +8630,9 @@
               </a:defRPr>
             </a:pPr>
             <a:r>
-              <a:rPr sz="1350" b="1">
-                <a:solidFill>
-                  <a:srgbClr val="FFFFFF"/>
+              <a:rPr sz="1125" b="1">
+                <a:solidFill>
+                  <a:srgbClr val="2C6E73"/>
                 </a:solidFill>
                 <a:latin typeface="Arial"/>
                 <a:ea typeface="Arial"/>
@@ -8642,19 +8648,19 @@
           <p:cNvPr id="19" name="">
             <a:extLst xmlns:a="http://schemas.openxmlformats.org/drawingml/2006/main">
               <a:ext uri="{FF2B5EF4-FFF2-40B4-BE49-F238E27FC236}">
-                <a16:creationId xmlns:a16="http://schemas.microsoft.com/office/drawing/2014/main" id="{0DF09CAC-3763-456A-8664-3851B106DDFF}"/>
-              </a:ext>
-            </a:extLst>
-          </p:cNvPr>
-          <p:cNvSpPr>
-            <a:spLocks xmlns:a="http://schemas.openxmlformats.org/drawingml/2006/main" noGrp="1"/>
-          </p:cNvSpPr>
-          <p:nvPr/>
-        </p:nvSpPr>
-        <p:spPr>
-          <a:xfrm xmlns:a="http://schemas.openxmlformats.org/drawingml/2006/main">
-            <a:off x="1714500" y="3667125"/>
-            <a:ext cx="9429750" cy="609600"/>
+                <a16:creationId xmlns:a16="http://schemas.microsoft.com/office/drawing/2014/main" id="{24C17D07-6AF7-4D41-AE23-D1169F558078}"/>
+              </a:ext>
+            </a:extLst>
+          </p:cNvPr>
+          <p:cNvSpPr>
+            <a:spLocks xmlns:a="http://schemas.openxmlformats.org/drawingml/2006/main" noGrp="1"/>
+          </p:cNvSpPr>
+          <p:nvPr/>
+        </p:nvSpPr>
+        <p:spPr>
+          <a:xfrm xmlns:a="http://schemas.openxmlformats.org/drawingml/2006/main">
+            <a:off x="1714500" y="3867150"/>
+            <a:ext cx="9525000" cy="809625"/>
           </a:xfrm>
           <a:prstGeom xmlns:a="http://schemas.openxmlformats.org/drawingml/2006/main" prst="rect">
             <a:avLst/>
@@ -8671,7 +8677,7 @@
           <a:lstStyle xmlns:a="http://schemas.openxmlformats.org/drawingml/2006/main"/>
           <a:p xmlns:a="http://schemas.openxmlformats.org/drawingml/2006/main">
             <a:pPr algn="l">
-              <a:defRPr sz="1500" b="0">
+              <a:defRPr sz="1725" b="0">
                 <a:solidFill>
                   <a:srgbClr val="17253A"/>
                 </a:solidFill>
@@ -8681,7 +8687,7 @@
               </a:defRPr>
             </a:pPr>
             <a:r>
-              <a:rPr sz="1500" b="0">
+              <a:rPr sz="1725" b="0">
                 <a:solidFill>
                   <a:srgbClr val="17253A"/>
                 </a:solidFill>
@@ -8689,7 +8695,7 @@
                 <a:ea typeface="Arial"/>
                 <a:cs typeface="Arial"/>
               </a:rPr>
-              <a:t>Complete the calculation: 240.</a:t>
+              <a:t>100% = 12 × 20</a:t>
             </a:r>
           </a:p>
         </p:txBody>
@@ -8699,28 +8705,30 @@
           <p:cNvPr id="20" name="">
             <a:extLst xmlns:a="http://schemas.openxmlformats.org/drawingml/2006/main">
               <a:ext uri="{FF2B5EF4-FFF2-40B4-BE49-F238E27FC236}">
-                <a16:creationId xmlns:a16="http://schemas.microsoft.com/office/drawing/2014/main" id="{C70A887C-2C3A-462A-998F-755F81A15BDD}"/>
-              </a:ext>
-            </a:extLst>
-          </p:cNvPr>
-          <p:cNvSpPr>
-            <a:spLocks xmlns:a="http://schemas.openxmlformats.org/drawingml/2006/main" noGrp="1"/>
-          </p:cNvSpPr>
-          <p:nvPr/>
-        </p:nvSpPr>
-        <p:spPr>
-          <a:xfrm xmlns:a="http://schemas.openxmlformats.org/drawingml/2006/main">
-            <a:off x="1000125" y="4476750"/>
-            <a:ext cx="476250" cy="476250"/>
-          </a:xfrm>
-          <a:prstGeom xmlns:a="http://schemas.openxmlformats.org/drawingml/2006/main" prst="ellipse">
+                <a16:creationId xmlns:a16="http://schemas.microsoft.com/office/drawing/2014/main" id="{A4CFE94C-91D3-49A6-968E-D97D40C59363}"/>
+              </a:ext>
+            </a:extLst>
+          </p:cNvPr>
+          <p:cNvSpPr>
+            <a:spLocks xmlns:a="http://schemas.openxmlformats.org/drawingml/2006/main" noGrp="1"/>
+          </p:cNvSpPr>
+          <p:nvPr/>
+        </p:nvSpPr>
+        <p:spPr>
+          <a:xfrm xmlns:a="http://schemas.openxmlformats.org/drawingml/2006/main">
+            <a:off x="1714500" y="4695825"/>
+            <a:ext cx="9334500" cy="9525"/>
+          </a:xfrm>
+          <a:prstGeom xmlns:a="http://schemas.openxmlformats.org/drawingml/2006/main" prst="rect">
             <a:avLst/>
           </a:prstGeom>
           <a:solidFill xmlns:a="http://schemas.openxmlformats.org/drawingml/2006/main">
-            <a:srgbClr val="2C6E73"/>
+            <a:srgbClr val="D9E0E6"/>
           </a:solidFill>
           <a:ln xmlns:a="http://schemas.openxmlformats.org/drawingml/2006/main" w="0">
-            <a:noFill/>
+            <a:solidFill>
+              <a:srgbClr val="D9E0E6"/>
+            </a:solidFill>
           </a:ln>
         </p:spPr>
       </p:sp>
@@ -8729,19 +8737,19 @@
           <p:cNvPr id="21" name="">
             <a:extLst xmlns:a="http://schemas.openxmlformats.org/drawingml/2006/main">
               <a:ext uri="{FF2B5EF4-FFF2-40B4-BE49-F238E27FC236}">
-                <a16:creationId xmlns:a16="http://schemas.microsoft.com/office/drawing/2014/main" id="{15EA91A1-F65C-41D9-AB42-1A15E902CD22}"/>
-              </a:ext>
-            </a:extLst>
-          </p:cNvPr>
-          <p:cNvSpPr>
-            <a:spLocks xmlns:a="http://schemas.openxmlformats.org/drawingml/2006/main" noGrp="1"/>
-          </p:cNvSpPr>
-          <p:nvPr/>
-        </p:nvSpPr>
-        <p:spPr>
-          <a:xfrm xmlns:a="http://schemas.openxmlformats.org/drawingml/2006/main">
-            <a:off x="1000125" y="4505325"/>
-            <a:ext cx="476250" cy="419100"/>
+                <a16:creationId xmlns:a16="http://schemas.microsoft.com/office/drawing/2014/main" id="{FFF4327C-CC00-4B18-B143-4698253AA8D7}"/>
+              </a:ext>
+            </a:extLst>
+          </p:cNvPr>
+          <p:cNvSpPr>
+            <a:spLocks xmlns:a="http://schemas.openxmlformats.org/drawingml/2006/main" noGrp="1"/>
+          </p:cNvSpPr>
+          <p:nvPr/>
+        </p:nvSpPr>
+        <p:spPr>
+          <a:xfrm xmlns:a="http://schemas.openxmlformats.org/drawingml/2006/main">
+            <a:off x="1162050" y="4829175"/>
+            <a:ext cx="400050" cy="400050"/>
           </a:xfrm>
           <a:prstGeom xmlns:a="http://schemas.openxmlformats.org/drawingml/2006/main" prst="rect">
             <a:avLst/>
@@ -8758,9 +8766,9 @@
           <a:lstStyle xmlns:a="http://schemas.openxmlformats.org/drawingml/2006/main"/>
           <a:p xmlns:a="http://schemas.openxmlformats.org/drawingml/2006/main">
             <a:pPr algn="ctr">
-              <a:defRPr sz="1350" b="1">
-                <a:solidFill>
-                  <a:srgbClr val="FFFFFF"/>
+              <a:defRPr sz="1125" b="1">
+                <a:solidFill>
+                  <a:srgbClr val="2F785D"/>
                 </a:solidFill>
                 <a:latin typeface="Arial"/>
                 <a:ea typeface="Arial"/>
@@ -8768,9 +8776,9 @@
               </a:defRPr>
             </a:pPr>
             <a:r>
-              <a:rPr sz="1350" b="1">
-                <a:solidFill>
-                  <a:srgbClr val="FFFFFF"/>
+              <a:rPr sz="1125" b="1">
+                <a:solidFill>
+                  <a:srgbClr val="2F785D"/>
                 </a:solidFill>
                 <a:latin typeface="Arial"/>
                 <a:ea typeface="Arial"/>
@@ -8786,19 +8794,19 @@
           <p:cNvPr id="22" name="">
             <a:extLst xmlns:a="http://schemas.openxmlformats.org/drawingml/2006/main">
               <a:ext uri="{FF2B5EF4-FFF2-40B4-BE49-F238E27FC236}">
-                <a16:creationId xmlns:a16="http://schemas.microsoft.com/office/drawing/2014/main" id="{E4395C8D-28B2-4298-96AB-85E588107BFE}"/>
-              </a:ext>
-            </a:extLst>
-          </p:cNvPr>
-          <p:cNvSpPr>
-            <a:spLocks xmlns:a="http://schemas.openxmlformats.org/drawingml/2006/main" noGrp="1"/>
-          </p:cNvSpPr>
-          <p:nvPr/>
-        </p:nvSpPr>
-        <p:spPr>
-          <a:xfrm xmlns:a="http://schemas.openxmlformats.org/drawingml/2006/main">
-            <a:off x="1714500" y="4410075"/>
-            <a:ext cx="9429750" cy="609600"/>
+                <a16:creationId xmlns:a16="http://schemas.microsoft.com/office/drawing/2014/main" id="{1C0853A6-54CA-497F-BDC6-297C889CD232}"/>
+              </a:ext>
+            </a:extLst>
+          </p:cNvPr>
+          <p:cNvSpPr>
+            <a:spLocks xmlns:a="http://schemas.openxmlformats.org/drawingml/2006/main" noGrp="1"/>
+          </p:cNvSpPr>
+          <p:nvPr/>
+        </p:nvSpPr>
+        <p:spPr>
+          <a:xfrm xmlns:a="http://schemas.openxmlformats.org/drawingml/2006/main">
+            <a:off x="1714500" y="4743450"/>
+            <a:ext cx="9525000" cy="809625"/>
           </a:xfrm>
           <a:prstGeom xmlns:a="http://schemas.openxmlformats.org/drawingml/2006/main" prst="rect">
             <a:avLst/>
@@ -8815,7 +8823,7 @@
           <a:lstStyle xmlns:a="http://schemas.openxmlformats.org/drawingml/2006/main"/>
           <a:p xmlns:a="http://schemas.openxmlformats.org/drawingml/2006/main">
             <a:pPr algn="l">
-              <a:defRPr sz="1500" b="1">
+              <a:defRPr sz="1725" b="1">
                 <a:solidFill>
                   <a:srgbClr val="2F785D"/>
                 </a:solidFill>
@@ -8825,7 +8833,7 @@
               </a:defRPr>
             </a:pPr>
             <a:r>
-              <a:rPr sz="1500" b="1">
+              <a:rPr sz="1725" b="1">
                 <a:solidFill>
                   <a:srgbClr val="2F785D"/>
                 </a:solidFill>
@@ -8833,7 +8841,7 @@
                 <a:ea typeface="Arial"/>
                 <a:cs typeface="Arial"/>
               </a:rPr>
-              <a:t>Check the result: Check the result against the whole amount and context.</a:t>
+              <a:t>Whole number = 240</a:t>
             </a:r>
           </a:p>
         </p:txBody>
@@ -8841,7 +8849,7 @@
     </p:spTree>
     <p:extLst>
       <p:ext uri="{BB962C8B-B14F-4D97-AF65-F5344CB8AC3E}">
-        <p14:creationId xmlns:p14="http://schemas.microsoft.com/office/powerpoint/2010/main" val="2135056822"/>
+        <p14:creationId xmlns:p14="http://schemas.microsoft.com/office/powerpoint/2010/main" val="1299220071"/>
       </p:ext>
     </p:extLst>
   </p:cSld>
@@ -9134,7 +9142,7 @@
           <p:cNvPr id="15" name="">
             <a:extLst xmlns:a="http://schemas.openxmlformats.org/drawingml/2006/main">
               <a:ext uri="{FF2B5EF4-FFF2-40B4-BE49-F238E27FC236}">
-                <a16:creationId xmlns:a16="http://schemas.microsoft.com/office/drawing/2014/main" id="{ADF39701-274A-4132-B6F8-FE224DE00FF6}"/>
+                <a16:creationId xmlns:a16="http://schemas.microsoft.com/office/drawing/2014/main" id="{F1DDD0D9-D452-468D-9FCB-419FCC710E1A}"/>
               </a:ext>
             </a:extLst>
           </p:cNvPr>
@@ -9166,7 +9174,7 @@
           <p:cNvPr id="2" name="">
             <a:extLst xmlns:a="http://schemas.openxmlformats.org/drawingml/2006/main">
               <a:ext uri="{FF2B5EF4-FFF2-40B4-BE49-F238E27FC236}">
-                <a16:creationId xmlns:a16="http://schemas.microsoft.com/office/drawing/2014/main" id="{CA057354-D347-46FD-953E-AFAC443F5D03}"/>
+                <a16:creationId xmlns:a16="http://schemas.microsoft.com/office/drawing/2014/main" id="{805FF62D-6FDC-4B61-9434-C28D1D5562A8}"/>
               </a:ext>
             </a:extLst>
           </p:cNvPr>
@@ -9223,7 +9231,7 @@
           <p:cNvPr id="3" name="">
             <a:extLst xmlns:a="http://schemas.openxmlformats.org/drawingml/2006/main">
               <a:ext uri="{FF2B5EF4-FFF2-40B4-BE49-F238E27FC236}">
-                <a16:creationId xmlns:a16="http://schemas.microsoft.com/office/drawing/2014/main" id="{93E5F36F-18C4-40FD-9F61-35A36D313F15}"/>
+                <a16:creationId xmlns:a16="http://schemas.microsoft.com/office/drawing/2014/main" id="{2DEFDBAA-DCFE-4138-ABC3-7B924AA2DAB7}"/>
               </a:ext>
             </a:extLst>
           </p:cNvPr>
@@ -9255,7 +9263,7 @@
           <p:cNvPr id="4" name="">
             <a:extLst xmlns:a="http://schemas.openxmlformats.org/drawingml/2006/main">
               <a:ext uri="{FF2B5EF4-FFF2-40B4-BE49-F238E27FC236}">
-                <a16:creationId xmlns:a16="http://schemas.microsoft.com/office/drawing/2014/main" id="{3ED9B670-F3CF-45AA-B7A0-A671E825B585}"/>
+                <a16:creationId xmlns:a16="http://schemas.microsoft.com/office/drawing/2014/main" id="{47580E4A-D6E4-45D5-8459-5BCAF26C3971}"/>
               </a:ext>
             </a:extLst>
           </p:cNvPr>
@@ -9312,7 +9320,7 @@
           <p:cNvPr id="5" name="">
             <a:extLst xmlns:a="http://schemas.openxmlformats.org/drawingml/2006/main">
               <a:ext uri="{FF2B5EF4-FFF2-40B4-BE49-F238E27FC236}">
-                <a16:creationId xmlns:a16="http://schemas.microsoft.com/office/drawing/2014/main" id="{B8FFC2C7-ECA8-4576-BB81-FACD47509782}"/>
+                <a16:creationId xmlns:a16="http://schemas.microsoft.com/office/drawing/2014/main" id="{62E1A94C-4394-46CF-A412-6A79B3397BF5}"/>
               </a:ext>
             </a:extLst>
           </p:cNvPr>
@@ -9369,7 +9377,7 @@
           <p:cNvPr id="6" name="">
             <a:extLst xmlns:a="http://schemas.openxmlformats.org/drawingml/2006/main">
               <a:ext uri="{FF2B5EF4-FFF2-40B4-BE49-F238E27FC236}">
-                <a16:creationId xmlns:a16="http://schemas.microsoft.com/office/drawing/2014/main" id="{6291FD26-BFC1-4489-88E7-EEED154D1435}"/>
+                <a16:creationId xmlns:a16="http://schemas.microsoft.com/office/drawing/2014/main" id="{F8619E06-B58E-4179-B5DD-8C513396DFA3}"/>
               </a:ext>
             </a:extLst>
           </p:cNvPr>
@@ -9426,7 +9434,7 @@
           <p:cNvPr id="7" name="">
             <a:extLst xmlns:a="http://schemas.openxmlformats.org/drawingml/2006/main">
               <a:ext uri="{FF2B5EF4-FFF2-40B4-BE49-F238E27FC236}">
-                <a16:creationId xmlns:a16="http://schemas.microsoft.com/office/drawing/2014/main" id="{DC0C96A6-2FBA-455A-99DE-342BDFBE1C2D}"/>
+                <a16:creationId xmlns:a16="http://schemas.microsoft.com/office/drawing/2014/main" id="{F49D5423-E3A2-4A4B-A491-9D54D3A14C54}"/>
               </a:ext>
             </a:extLst>
           </p:cNvPr>
@@ -9458,7 +9466,7 @@
           <p:cNvPr id="8" name="">
             <a:extLst xmlns:a="http://schemas.openxmlformats.org/drawingml/2006/main">
               <a:ext uri="{FF2B5EF4-FFF2-40B4-BE49-F238E27FC236}">
-                <a16:creationId xmlns:a16="http://schemas.microsoft.com/office/drawing/2014/main" id="{36432100-010C-465B-942D-4DBA27B1DF5B}"/>
+                <a16:creationId xmlns:a16="http://schemas.microsoft.com/office/drawing/2014/main" id="{32E239EE-00A7-4019-BF1E-3DA9577B6445}"/>
               </a:ext>
             </a:extLst>
           </p:cNvPr>
@@ -9515,7 +9523,7 @@
           <p:cNvPr id="9" name="">
             <a:extLst xmlns:a="http://schemas.openxmlformats.org/drawingml/2006/main">
               <a:ext uri="{FF2B5EF4-FFF2-40B4-BE49-F238E27FC236}">
-                <a16:creationId xmlns:a16="http://schemas.microsoft.com/office/drawing/2014/main" id="{CDAA2197-CC18-4A75-837A-EF9E7E5EA8E2}"/>
+                <a16:creationId xmlns:a16="http://schemas.microsoft.com/office/drawing/2014/main" id="{C393D485-AD0B-4FEC-A896-47E08562C9F2}"/>
               </a:ext>
             </a:extLst>
           </p:cNvPr>
@@ -9572,7 +9580,7 @@
           <p:cNvPr id="10" name="">
             <a:extLst xmlns:a="http://schemas.openxmlformats.org/drawingml/2006/main">
               <a:ext uri="{FF2B5EF4-FFF2-40B4-BE49-F238E27FC236}">
-                <a16:creationId xmlns:a16="http://schemas.microsoft.com/office/drawing/2014/main" id="{76EA022A-9A85-4814-B444-E6DEDD134B30}"/>
+                <a16:creationId xmlns:a16="http://schemas.microsoft.com/office/drawing/2014/main" id="{0B7A6CE0-DA81-44F4-9249-3DCF234DB148}"/>
               </a:ext>
             </a:extLst>
           </p:cNvPr>
@@ -9629,7 +9637,7 @@
           <p:cNvPr id="11" name="">
             <a:extLst xmlns:a="http://schemas.openxmlformats.org/drawingml/2006/main">
               <a:ext uri="{FF2B5EF4-FFF2-40B4-BE49-F238E27FC236}">
-                <a16:creationId xmlns:a16="http://schemas.microsoft.com/office/drawing/2014/main" id="{D4D6F1C3-4A13-4A11-9EB5-F2D74E879C0C}"/>
+                <a16:creationId xmlns:a16="http://schemas.microsoft.com/office/drawing/2014/main" id="{4237E022-C770-42CC-8ABA-566967CDAB3C}"/>
               </a:ext>
             </a:extLst>
           </p:cNvPr>
@@ -9686,7 +9694,7 @@
           <p:cNvPr id="12" name="">
             <a:extLst xmlns:a="http://schemas.openxmlformats.org/drawingml/2006/main">
               <a:ext uri="{FF2B5EF4-FFF2-40B4-BE49-F238E27FC236}">
-                <a16:creationId xmlns:a16="http://schemas.microsoft.com/office/drawing/2014/main" id="{0FCA303B-2CE4-4009-B3A1-7E9C8E119700}"/>
+                <a16:creationId xmlns:a16="http://schemas.microsoft.com/office/drawing/2014/main" id="{EBE6E3A0-7343-46E4-840E-6F845AE25E9D}"/>
               </a:ext>
             </a:extLst>
           </p:cNvPr>
@@ -9718,7 +9726,7 @@
           <p:cNvPr id="13" name="">
             <a:extLst xmlns:a="http://schemas.openxmlformats.org/drawingml/2006/main">
               <a:ext uri="{FF2B5EF4-FFF2-40B4-BE49-F238E27FC236}">
-                <a16:creationId xmlns:a16="http://schemas.microsoft.com/office/drawing/2014/main" id="{36748C46-5CD6-4F1D-AAEC-B5549DC54C5F}"/>
+                <a16:creationId xmlns:a16="http://schemas.microsoft.com/office/drawing/2014/main" id="{B3F3BB33-CA08-42F3-A606-692E309725C8}"/>
               </a:ext>
             </a:extLst>
           </p:cNvPr>
@@ -9775,7 +9783,7 @@
           <p:cNvPr id="14" name="">
             <a:extLst xmlns:a="http://schemas.openxmlformats.org/drawingml/2006/main">
               <a:ext uri="{FF2B5EF4-FFF2-40B4-BE49-F238E27FC236}">
-                <a16:creationId xmlns:a16="http://schemas.microsoft.com/office/drawing/2014/main" id="{20474032-2E8A-4C45-B782-A5A72CD11147}"/>
+                <a16:creationId xmlns:a16="http://schemas.microsoft.com/office/drawing/2014/main" id="{D5892D7A-A710-4ACD-BAE0-BFCA7D178372}"/>
               </a:ext>
             </a:extLst>
           </p:cNvPr>
@@ -9830,7 +9838,7 @@
     </p:spTree>
     <p:extLst>
       <p:ext uri="{BB962C8B-B14F-4D97-AF65-F5344CB8AC3E}">
-        <p14:creationId xmlns:p14="http://schemas.microsoft.com/office/powerpoint/2010/main" val="1608558791"/>
+        <p14:creationId xmlns:p14="http://schemas.microsoft.com/office/powerpoint/2010/main" val="251991894"/>
       </p:ext>
     </p:extLst>
   </p:cSld>
@@ -10031,7 +10039,7 @@
           <p:cNvPr id="16" name="">
             <a:extLst xmlns:a="http://schemas.openxmlformats.org/drawingml/2006/main">
               <a:ext uri="{FF2B5EF4-FFF2-40B4-BE49-F238E27FC236}">
-                <a16:creationId xmlns:a16="http://schemas.microsoft.com/office/drawing/2014/main" id="{1CA4960E-BE8A-4D78-BF17-2C3CE7288D40}"/>
+                <a16:creationId xmlns:a16="http://schemas.microsoft.com/office/drawing/2014/main" id="{45E4FE8B-B246-4D18-9FE8-8F93E882EAB7}"/>
               </a:ext>
             </a:extLst>
           </p:cNvPr>
@@ -10063,7 +10071,7 @@
           <p:cNvPr id="2" name="">
             <a:extLst xmlns:a="http://schemas.openxmlformats.org/drawingml/2006/main">
               <a:ext uri="{FF2B5EF4-FFF2-40B4-BE49-F238E27FC236}">
-                <a16:creationId xmlns:a16="http://schemas.microsoft.com/office/drawing/2014/main" id="{F24F0F29-0C1A-4988-A6BC-831D161F0449}"/>
+                <a16:creationId xmlns:a16="http://schemas.microsoft.com/office/drawing/2014/main" id="{C4667FA3-4030-4B04-8968-986E490A2CB1}"/>
               </a:ext>
             </a:extLst>
           </p:cNvPr>
@@ -10120,7 +10128,7 @@
           <p:cNvPr id="3" name="">
             <a:extLst xmlns:a="http://schemas.openxmlformats.org/drawingml/2006/main">
               <a:ext uri="{FF2B5EF4-FFF2-40B4-BE49-F238E27FC236}">
-                <a16:creationId xmlns:a16="http://schemas.microsoft.com/office/drawing/2014/main" id="{ED5D5EE4-B704-439E-8B51-0CDDC836E5E6}"/>
+                <a16:creationId xmlns:a16="http://schemas.microsoft.com/office/drawing/2014/main" id="{5E9B1B01-1A03-4F56-AA6C-1B48605AB620}"/>
               </a:ext>
             </a:extLst>
           </p:cNvPr>
@@ -10152,7 +10160,7 @@
           <p:cNvPr id="4" name="">
             <a:extLst xmlns:a="http://schemas.openxmlformats.org/drawingml/2006/main">
               <a:ext uri="{FF2B5EF4-FFF2-40B4-BE49-F238E27FC236}">
-                <a16:creationId xmlns:a16="http://schemas.microsoft.com/office/drawing/2014/main" id="{16551092-81BC-411C-A3E1-FE7DDAC7BED4}"/>
+                <a16:creationId xmlns:a16="http://schemas.microsoft.com/office/drawing/2014/main" id="{CC254C4E-C093-41FE-857C-DA22770A64C9}"/>
               </a:ext>
             </a:extLst>
           </p:cNvPr>
@@ -10209,7 +10217,7 @@
           <p:cNvPr id="5" name="">
             <a:extLst xmlns:a="http://schemas.openxmlformats.org/drawingml/2006/main">
               <a:ext uri="{FF2B5EF4-FFF2-40B4-BE49-F238E27FC236}">
-                <a16:creationId xmlns:a16="http://schemas.microsoft.com/office/drawing/2014/main" id="{3247B0A8-DC6C-47B5-89C7-18A73C480913}"/>
+                <a16:creationId xmlns:a16="http://schemas.microsoft.com/office/drawing/2014/main" id="{2DD446B2-0345-4760-BCB2-2B04BCE49F4B}"/>
               </a:ext>
             </a:extLst>
           </p:cNvPr>
@@ -10266,7 +10274,7 @@
           <p:cNvPr id="6" name="">
             <a:extLst xmlns:a="http://schemas.openxmlformats.org/drawingml/2006/main">
               <a:ext uri="{FF2B5EF4-FFF2-40B4-BE49-F238E27FC236}">
-                <a16:creationId xmlns:a16="http://schemas.microsoft.com/office/drawing/2014/main" id="{90F94C4B-C1CA-4770-9E77-F629BF188F15}"/>
+                <a16:creationId xmlns:a16="http://schemas.microsoft.com/office/drawing/2014/main" id="{BA9D5CE2-49A9-4136-AA99-47D808BB2A32}"/>
               </a:ext>
             </a:extLst>
           </p:cNvPr>
@@ -10323,7 +10331,7 @@
           <p:cNvPr id="7" name="">
             <a:extLst xmlns:a="http://schemas.openxmlformats.org/drawingml/2006/main">
               <a:ext uri="{FF2B5EF4-FFF2-40B4-BE49-F238E27FC236}">
-                <a16:creationId xmlns:a16="http://schemas.microsoft.com/office/drawing/2014/main" id="{9626162C-FFBA-4F93-8600-DDE4C3D87283}"/>
+                <a16:creationId xmlns:a16="http://schemas.microsoft.com/office/drawing/2014/main" id="{391AE233-811D-4AFB-ADF5-4EB5A99001F5}"/>
               </a:ext>
             </a:extLst>
           </p:cNvPr>
@@ -10355,7 +10363,7 @@
           <p:cNvPr id="8" name="">
             <a:extLst xmlns:a="http://schemas.openxmlformats.org/drawingml/2006/main">
               <a:ext uri="{FF2B5EF4-FFF2-40B4-BE49-F238E27FC236}">
-                <a16:creationId xmlns:a16="http://schemas.microsoft.com/office/drawing/2014/main" id="{C68E31F7-AFE8-447B-9783-636D5CB1C7CE}"/>
+                <a16:creationId xmlns:a16="http://schemas.microsoft.com/office/drawing/2014/main" id="{27853FCE-4DC1-4565-90C3-169FA53F8A25}"/>
               </a:ext>
             </a:extLst>
           </p:cNvPr>
@@ -10412,7 +10420,7 @@
           <p:cNvPr id="9" name="">
             <a:extLst xmlns:a="http://schemas.openxmlformats.org/drawingml/2006/main">
               <a:ext uri="{FF2B5EF4-FFF2-40B4-BE49-F238E27FC236}">
-                <a16:creationId xmlns:a16="http://schemas.microsoft.com/office/drawing/2014/main" id="{9C9A7492-4BDD-4CA8-ACC0-39B4AA13FFDA}"/>
+                <a16:creationId xmlns:a16="http://schemas.microsoft.com/office/drawing/2014/main" id="{73D18174-3BBB-4429-B3E2-A71E2D71977C}"/>
               </a:ext>
             </a:extLst>
           </p:cNvPr>
@@ -10469,7 +10477,7 @@
           <p:cNvPr id="10" name="">
             <a:extLst xmlns:a="http://schemas.openxmlformats.org/drawingml/2006/main">
               <a:ext uri="{FF2B5EF4-FFF2-40B4-BE49-F238E27FC236}">
-                <a16:creationId xmlns:a16="http://schemas.microsoft.com/office/drawing/2014/main" id="{FEE5036A-57C2-4875-8BC5-787FB44D3D03}"/>
+                <a16:creationId xmlns:a16="http://schemas.microsoft.com/office/drawing/2014/main" id="{C43CFB4E-D50D-4F7F-8AA0-845049EE0218}"/>
               </a:ext>
             </a:extLst>
           </p:cNvPr>
@@ -10526,7 +10534,7 @@
           <p:cNvPr id="11" name="">
             <a:extLst xmlns:a="http://schemas.openxmlformats.org/drawingml/2006/main">
               <a:ext uri="{FF2B5EF4-FFF2-40B4-BE49-F238E27FC236}">
-                <a16:creationId xmlns:a16="http://schemas.microsoft.com/office/drawing/2014/main" id="{0DBC986C-64AE-4707-8B6F-C20959E6F6F2}"/>
+                <a16:creationId xmlns:a16="http://schemas.microsoft.com/office/drawing/2014/main" id="{6418F0A4-8645-4AF0-9E2E-E8446D82E875}"/>
               </a:ext>
             </a:extLst>
           </p:cNvPr>
@@ -10583,7 +10591,7 @@
           <p:cNvPr id="12" name="">
             <a:extLst xmlns:a="http://schemas.openxmlformats.org/drawingml/2006/main">
               <a:ext uri="{FF2B5EF4-FFF2-40B4-BE49-F238E27FC236}">
-                <a16:creationId xmlns:a16="http://schemas.microsoft.com/office/drawing/2014/main" id="{ECAB90A5-246C-4165-8808-C4BB48037E67}"/>
+                <a16:creationId xmlns:a16="http://schemas.microsoft.com/office/drawing/2014/main" id="{1EFC93A1-4DF5-4C84-BF1D-6952FE2B9C28}"/>
               </a:ext>
             </a:extLst>
           </p:cNvPr>
@@ -10640,7 +10648,7 @@
           <p:cNvPr id="13" name="">
             <a:extLst xmlns:a="http://schemas.openxmlformats.org/drawingml/2006/main">
               <a:ext uri="{FF2B5EF4-FFF2-40B4-BE49-F238E27FC236}">
-                <a16:creationId xmlns:a16="http://schemas.microsoft.com/office/drawing/2014/main" id="{9E3053FE-9044-4987-B131-B96F0A3D325C}"/>
+                <a16:creationId xmlns:a16="http://schemas.microsoft.com/office/drawing/2014/main" id="{C140026C-6BB5-4CCB-B174-53B7D305E272}"/>
               </a:ext>
             </a:extLst>
           </p:cNvPr>
@@ -10697,7 +10705,7 @@
           <p:cNvPr id="14" name="">
             <a:extLst xmlns:a="http://schemas.openxmlformats.org/drawingml/2006/main">
               <a:ext uri="{FF2B5EF4-FFF2-40B4-BE49-F238E27FC236}">
-                <a16:creationId xmlns:a16="http://schemas.microsoft.com/office/drawing/2014/main" id="{BEB2371D-E227-4237-A5A3-972268AFD519}"/>
+                <a16:creationId xmlns:a16="http://schemas.microsoft.com/office/drawing/2014/main" id="{F8B83557-E697-475B-8ED5-8066D857C1ED}"/>
               </a:ext>
             </a:extLst>
           </p:cNvPr>
@@ -10754,7 +10762,7 @@
           <p:cNvPr id="15" name="">
             <a:extLst xmlns:a="http://schemas.openxmlformats.org/drawingml/2006/main">
               <a:ext uri="{FF2B5EF4-FFF2-40B4-BE49-F238E27FC236}">
-                <a16:creationId xmlns:a16="http://schemas.microsoft.com/office/drawing/2014/main" id="{B4B1FFE6-33AF-4D35-BB3F-4C3F99A549B2}"/>
+                <a16:creationId xmlns:a16="http://schemas.microsoft.com/office/drawing/2014/main" id="{94CDACB6-025C-42C0-84E6-75A80C279916}"/>
               </a:ext>
             </a:extLst>
           </p:cNvPr>
@@ -10809,7 +10817,7 @@
     </p:spTree>
     <p:extLst>
       <p:ext uri="{BB962C8B-B14F-4D97-AF65-F5344CB8AC3E}">
-        <p14:creationId xmlns:p14="http://schemas.microsoft.com/office/powerpoint/2010/main" val="1042653500"/>
+        <p14:creationId xmlns:p14="http://schemas.microsoft.com/office/powerpoint/2010/main" val="1250717457"/>
       </p:ext>
     </p:extLst>
   </p:cSld>
@@ -10964,7 +10972,7 @@
           <p:cNvPr id="16" name="">
             <a:extLst xmlns:a="http://schemas.openxmlformats.org/drawingml/2006/main">
               <a:ext uri="{FF2B5EF4-FFF2-40B4-BE49-F238E27FC236}">
-                <a16:creationId xmlns:a16="http://schemas.microsoft.com/office/drawing/2014/main" id="{A004AA4B-6044-490F-9B2D-D5F9DBE848D5}"/>
+                <a16:creationId xmlns:a16="http://schemas.microsoft.com/office/drawing/2014/main" id="{0A022A58-5FA4-4676-AE5A-4F374B996533}"/>
               </a:ext>
             </a:extLst>
           </p:cNvPr>
@@ -10996,7 +11004,7 @@
           <p:cNvPr id="2" name="">
             <a:extLst xmlns:a="http://schemas.openxmlformats.org/drawingml/2006/main">
               <a:ext uri="{FF2B5EF4-FFF2-40B4-BE49-F238E27FC236}">
-                <a16:creationId xmlns:a16="http://schemas.microsoft.com/office/drawing/2014/main" id="{D9C351E5-57CC-4621-9526-94ED6AC40895}"/>
+                <a16:creationId xmlns:a16="http://schemas.microsoft.com/office/drawing/2014/main" id="{352E2BC7-6979-4BC9-BDB0-F0B76B244510}"/>
               </a:ext>
             </a:extLst>
           </p:cNvPr>
@@ -11053,7 +11061,7 @@
           <p:cNvPr id="3" name="">
             <a:extLst xmlns:a="http://schemas.openxmlformats.org/drawingml/2006/main">
               <a:ext uri="{FF2B5EF4-FFF2-40B4-BE49-F238E27FC236}">
-                <a16:creationId xmlns:a16="http://schemas.microsoft.com/office/drawing/2014/main" id="{5310F4BC-820A-4B10-B637-E7635CA2B7A1}"/>
+                <a16:creationId xmlns:a16="http://schemas.microsoft.com/office/drawing/2014/main" id="{9C2A492B-ED6C-4371-8812-B123D842A8CA}"/>
               </a:ext>
             </a:extLst>
           </p:cNvPr>
@@ -11085,7 +11093,7 @@
           <p:cNvPr id="4" name="">
             <a:extLst xmlns:a="http://schemas.openxmlformats.org/drawingml/2006/main">
               <a:ext uri="{FF2B5EF4-FFF2-40B4-BE49-F238E27FC236}">
-                <a16:creationId xmlns:a16="http://schemas.microsoft.com/office/drawing/2014/main" id="{62A89A29-3967-48E1-9AB2-BD06EE1606AB}"/>
+                <a16:creationId xmlns:a16="http://schemas.microsoft.com/office/drawing/2014/main" id="{1E2D6908-D9A0-4AED-8FDA-EED421472768}"/>
               </a:ext>
             </a:extLst>
           </p:cNvPr>
@@ -11142,7 +11150,7 @@
           <p:cNvPr id="5" name="">
             <a:extLst xmlns:a="http://schemas.openxmlformats.org/drawingml/2006/main">
               <a:ext uri="{FF2B5EF4-FFF2-40B4-BE49-F238E27FC236}">
-                <a16:creationId xmlns:a16="http://schemas.microsoft.com/office/drawing/2014/main" id="{4EB02FEE-6131-48F2-B8EC-1EBAB7BD8271}"/>
+                <a16:creationId xmlns:a16="http://schemas.microsoft.com/office/drawing/2014/main" id="{296DE6BF-D780-47FA-88EE-3AD91168DE4A}"/>
               </a:ext>
             </a:extLst>
           </p:cNvPr>
@@ -11199,7 +11207,7 @@
           <p:cNvPr id="6" name="">
             <a:extLst xmlns:a="http://schemas.openxmlformats.org/drawingml/2006/main">
               <a:ext uri="{FF2B5EF4-FFF2-40B4-BE49-F238E27FC236}">
-                <a16:creationId xmlns:a16="http://schemas.microsoft.com/office/drawing/2014/main" id="{58E0F134-BBAF-419B-A934-9E3E01325693}"/>
+                <a16:creationId xmlns:a16="http://schemas.microsoft.com/office/drawing/2014/main" id="{BBC89689-8359-4DC9-AA83-5B3E26083175}"/>
               </a:ext>
             </a:extLst>
           </p:cNvPr>
@@ -11256,7 +11264,7 @@
           <p:cNvPr id="7" name="">
             <a:extLst xmlns:a="http://schemas.openxmlformats.org/drawingml/2006/main">
               <a:ext uri="{FF2B5EF4-FFF2-40B4-BE49-F238E27FC236}">
-                <a16:creationId xmlns:a16="http://schemas.microsoft.com/office/drawing/2014/main" id="{DD9B85F0-4025-4AEC-9110-71A363BD1AA2}"/>
+                <a16:creationId xmlns:a16="http://schemas.microsoft.com/office/drawing/2014/main" id="{43536B4B-AA03-4213-99FD-B380B6597A9B}"/>
               </a:ext>
             </a:extLst>
           </p:cNvPr>
@@ -11288,7 +11296,7 @@
           <p:cNvPr id="8" name="">
             <a:extLst xmlns:a="http://schemas.openxmlformats.org/drawingml/2006/main">
               <a:ext uri="{FF2B5EF4-FFF2-40B4-BE49-F238E27FC236}">
-                <a16:creationId xmlns:a16="http://schemas.microsoft.com/office/drawing/2014/main" id="{FBEC7247-B2D3-421A-91D9-B29C59E290E1}"/>
+                <a16:creationId xmlns:a16="http://schemas.microsoft.com/office/drawing/2014/main" id="{B744C37E-1EE0-4CB1-BADD-6AF802581305}"/>
               </a:ext>
             </a:extLst>
           </p:cNvPr>
@@ -11345,7 +11353,7 @@
           <p:cNvPr id="9" name="">
             <a:extLst xmlns:a="http://schemas.openxmlformats.org/drawingml/2006/main">
               <a:ext uri="{FF2B5EF4-FFF2-40B4-BE49-F238E27FC236}">
-                <a16:creationId xmlns:a16="http://schemas.microsoft.com/office/drawing/2014/main" id="{83994BBE-84A0-455B-88EF-34237A2FB393}"/>
+                <a16:creationId xmlns:a16="http://schemas.microsoft.com/office/drawing/2014/main" id="{AFF439B9-205D-4E5B-8380-7B16AF06CEB9}"/>
               </a:ext>
             </a:extLst>
           </p:cNvPr>
@@ -11406,7 +11414,7 @@
           <p:nvPr/>
         </p:nvPicPr>
         <p:blipFill>
-          <a:blip xmlns:r="http://schemas.openxmlformats.org/officeDocument/2006/relationships" xmlns:a="http://schemas.openxmlformats.org/drawingml/2006/main" r:embed="R2c3ab3bdf844417b"/>
+          <a:blip xmlns:r="http://schemas.openxmlformats.org/officeDocument/2006/relationships" xmlns:a="http://schemas.openxmlformats.org/drawingml/2006/main" r:embed="R701daab356d64e3c"/>
           <a:stretch xmlns:a="http://schemas.openxmlformats.org/drawingml/2006/main"/>
         </p:blipFill>
         <p:spPr>
@@ -11424,7 +11432,7 @@
           <p:cNvPr id="11" name="">
             <a:extLst xmlns:a="http://schemas.openxmlformats.org/drawingml/2006/main">
               <a:ext uri="{FF2B5EF4-FFF2-40B4-BE49-F238E27FC236}">
-                <a16:creationId xmlns:a16="http://schemas.microsoft.com/office/drawing/2014/main" id="{5C57B5E9-6A82-4981-A1E6-9CA1744E8C58}"/>
+                <a16:creationId xmlns:a16="http://schemas.microsoft.com/office/drawing/2014/main" id="{7CC24501-5DF7-46E9-8A9B-19FD92C5CE95}"/>
               </a:ext>
             </a:extLst>
           </p:cNvPr>
@@ -11481,7 +11489,7 @@
           <p:cNvPr id="12" name="">
             <a:extLst xmlns:a="http://schemas.openxmlformats.org/drawingml/2006/main">
               <a:ext uri="{FF2B5EF4-FFF2-40B4-BE49-F238E27FC236}">
-                <a16:creationId xmlns:a16="http://schemas.microsoft.com/office/drawing/2014/main" id="{61AC75B5-966E-47EB-9FB2-CAC8C4661A45}"/>
+                <a16:creationId xmlns:a16="http://schemas.microsoft.com/office/drawing/2014/main" id="{DCCAC46E-C47E-45DF-8F03-58945481E3A2}"/>
               </a:ext>
             </a:extLst>
           </p:cNvPr>
@@ -11538,7 +11546,7 @@
           <p:cNvPr id="13" name="">
             <a:extLst xmlns:a="http://schemas.openxmlformats.org/drawingml/2006/main">
               <a:ext uri="{FF2B5EF4-FFF2-40B4-BE49-F238E27FC236}">
-                <a16:creationId xmlns:a16="http://schemas.microsoft.com/office/drawing/2014/main" id="{2F7E19EB-E16E-4A46-A185-96DDFECF936B}"/>
+                <a16:creationId xmlns:a16="http://schemas.microsoft.com/office/drawing/2014/main" id="{CAA778D7-A833-4681-B295-12D4D2BA92D0}"/>
               </a:ext>
             </a:extLst>
           </p:cNvPr>
@@ -11570,7 +11578,7 @@
           <p:cNvPr id="14" name="">
             <a:extLst xmlns:a="http://schemas.openxmlformats.org/drawingml/2006/main">
               <a:ext uri="{FF2B5EF4-FFF2-40B4-BE49-F238E27FC236}">
-                <a16:creationId xmlns:a16="http://schemas.microsoft.com/office/drawing/2014/main" id="{9CF238E6-EED6-4EDB-9A87-C46935B7B763}"/>
+                <a16:creationId xmlns:a16="http://schemas.microsoft.com/office/drawing/2014/main" id="{E3789F00-7338-4F9B-9050-75D4AABB4894}"/>
               </a:ext>
             </a:extLst>
           </p:cNvPr>
@@ -11627,7 +11635,7 @@
           <p:cNvPr id="15" name="">
             <a:extLst xmlns:a="http://schemas.openxmlformats.org/drawingml/2006/main">
               <a:ext uri="{FF2B5EF4-FFF2-40B4-BE49-F238E27FC236}">
-                <a16:creationId xmlns:a16="http://schemas.microsoft.com/office/drawing/2014/main" id="{C45CB36A-19DC-41F3-A91A-5AA052AD4DE4}"/>
+                <a16:creationId xmlns:a16="http://schemas.microsoft.com/office/drawing/2014/main" id="{FB915202-1D64-4739-9DAB-82D9DFB6B266}"/>
               </a:ext>
             </a:extLst>
           </p:cNvPr>
@@ -11682,7 +11690,7 @@
     </p:spTree>
     <p:extLst>
       <p:ext uri="{BB962C8B-B14F-4D97-AF65-F5344CB8AC3E}">
-        <p14:creationId xmlns:p14="http://schemas.microsoft.com/office/powerpoint/2010/main" val="461151733"/>
+        <p14:creationId xmlns:p14="http://schemas.microsoft.com/office/powerpoint/2010/main" val="1488820281"/>
       </p:ext>
     </p:extLst>
   </p:cSld>
@@ -11837,7 +11845,7 @@
           <p:cNvPr id="23" name="">
             <a:extLst xmlns:a="http://schemas.openxmlformats.org/drawingml/2006/main">
               <a:ext uri="{FF2B5EF4-FFF2-40B4-BE49-F238E27FC236}">
-                <a16:creationId xmlns:a16="http://schemas.microsoft.com/office/drawing/2014/main" id="{A121E1F0-058A-4785-AD26-EAF98D26BB61}"/>
+                <a16:creationId xmlns:a16="http://schemas.microsoft.com/office/drawing/2014/main" id="{AB266D83-588D-4B81-840A-7EE3FC72456E}"/>
               </a:ext>
             </a:extLst>
           </p:cNvPr>
@@ -11869,7 +11877,7 @@
           <p:cNvPr id="2" name="">
             <a:extLst xmlns:a="http://schemas.openxmlformats.org/drawingml/2006/main">
               <a:ext uri="{FF2B5EF4-FFF2-40B4-BE49-F238E27FC236}">
-                <a16:creationId xmlns:a16="http://schemas.microsoft.com/office/drawing/2014/main" id="{349A122B-6A71-4072-A600-B409CEE5DD0D}"/>
+                <a16:creationId xmlns:a16="http://schemas.microsoft.com/office/drawing/2014/main" id="{41269839-74A7-4914-8D1D-C58897C4CB1C}"/>
               </a:ext>
             </a:extLst>
           </p:cNvPr>
@@ -11926,7 +11934,7 @@
           <p:cNvPr id="3" name="">
             <a:extLst xmlns:a="http://schemas.openxmlformats.org/drawingml/2006/main">
               <a:ext uri="{FF2B5EF4-FFF2-40B4-BE49-F238E27FC236}">
-                <a16:creationId xmlns:a16="http://schemas.microsoft.com/office/drawing/2014/main" id="{3CFB0DD0-55C8-4170-AEE3-BD72A43E1751}"/>
+                <a16:creationId xmlns:a16="http://schemas.microsoft.com/office/drawing/2014/main" id="{BDE45DCD-5BF2-4F1B-80A1-806EDD3FF10B}"/>
               </a:ext>
             </a:extLst>
           </p:cNvPr>
@@ -11958,7 +11966,7 @@
           <p:cNvPr id="4" name="">
             <a:extLst xmlns:a="http://schemas.openxmlformats.org/drawingml/2006/main">
               <a:ext uri="{FF2B5EF4-FFF2-40B4-BE49-F238E27FC236}">
-                <a16:creationId xmlns:a16="http://schemas.microsoft.com/office/drawing/2014/main" id="{83F99D7C-E92E-4692-AB1C-4D936E983FC4}"/>
+                <a16:creationId xmlns:a16="http://schemas.microsoft.com/office/drawing/2014/main" id="{299352A0-C072-4D57-8CDC-0EE9BD522678}"/>
               </a:ext>
             </a:extLst>
           </p:cNvPr>
@@ -12015,7 +12023,7 @@
           <p:cNvPr id="5" name="">
             <a:extLst xmlns:a="http://schemas.openxmlformats.org/drawingml/2006/main">
               <a:ext uri="{FF2B5EF4-FFF2-40B4-BE49-F238E27FC236}">
-                <a16:creationId xmlns:a16="http://schemas.microsoft.com/office/drawing/2014/main" id="{A62BB39A-7911-4FFE-A395-02590C5D2387}"/>
+                <a16:creationId xmlns:a16="http://schemas.microsoft.com/office/drawing/2014/main" id="{31B6DAC3-73FB-47DC-934A-A6BC8F485183}"/>
               </a:ext>
             </a:extLst>
           </p:cNvPr>
@@ -12072,7 +12080,7 @@
           <p:cNvPr id="6" name="">
             <a:extLst xmlns:a="http://schemas.openxmlformats.org/drawingml/2006/main">
               <a:ext uri="{FF2B5EF4-FFF2-40B4-BE49-F238E27FC236}">
-                <a16:creationId xmlns:a16="http://schemas.microsoft.com/office/drawing/2014/main" id="{1734C50B-5B5D-40EB-9772-96FCFE3AC118}"/>
+                <a16:creationId xmlns:a16="http://schemas.microsoft.com/office/drawing/2014/main" id="{D60808EA-5F40-4FEB-ABB3-5F505DC71843}"/>
               </a:ext>
             </a:extLst>
           </p:cNvPr>
@@ -12129,7 +12137,7 @@
           <p:cNvPr id="7" name="">
             <a:extLst xmlns:a="http://schemas.openxmlformats.org/drawingml/2006/main">
               <a:ext uri="{FF2B5EF4-FFF2-40B4-BE49-F238E27FC236}">
-                <a16:creationId xmlns:a16="http://schemas.microsoft.com/office/drawing/2014/main" id="{F5F557C0-BDFC-403E-AC1E-88CEDD865740}"/>
+                <a16:creationId xmlns:a16="http://schemas.microsoft.com/office/drawing/2014/main" id="{BA543012-10DA-4835-BECF-6218D8A48A81}"/>
               </a:ext>
             </a:extLst>
           </p:cNvPr>
@@ -12161,7 +12169,7 @@
           <p:cNvPr id="8" name="">
             <a:extLst xmlns:a="http://schemas.openxmlformats.org/drawingml/2006/main">
               <a:ext uri="{FF2B5EF4-FFF2-40B4-BE49-F238E27FC236}">
-                <a16:creationId xmlns:a16="http://schemas.microsoft.com/office/drawing/2014/main" id="{FB478307-6D21-477A-92B8-A1117D307022}"/>
+                <a16:creationId xmlns:a16="http://schemas.microsoft.com/office/drawing/2014/main" id="{81295CB9-437F-4AC6-B674-A688BE43B30A}"/>
               </a:ext>
             </a:extLst>
           </p:cNvPr>
@@ -12218,7 +12226,7 @@
           <p:cNvPr id="9" name="">
             <a:extLst xmlns:a="http://schemas.openxmlformats.org/drawingml/2006/main">
               <a:ext uri="{FF2B5EF4-FFF2-40B4-BE49-F238E27FC236}">
-                <a16:creationId xmlns:a16="http://schemas.microsoft.com/office/drawing/2014/main" id="{03669BD8-4E55-432B-B9E0-87C674BEBD21}"/>
+                <a16:creationId xmlns:a16="http://schemas.microsoft.com/office/drawing/2014/main" id="{E4250315-C757-4118-BE14-9B34CA737E03}"/>
               </a:ext>
             </a:extLst>
           </p:cNvPr>
@@ -12275,7 +12283,7 @@
           <p:cNvPr id="10" name="">
             <a:extLst xmlns:a="http://schemas.openxmlformats.org/drawingml/2006/main">
               <a:ext uri="{FF2B5EF4-FFF2-40B4-BE49-F238E27FC236}">
-                <a16:creationId xmlns:a16="http://schemas.microsoft.com/office/drawing/2014/main" id="{C1D4AB32-2E1A-44B6-8AF4-48E51A9230AA}"/>
+                <a16:creationId xmlns:a16="http://schemas.microsoft.com/office/drawing/2014/main" id="{3DA94520-6345-4C95-980C-B506DE1285E1}"/>
               </a:ext>
             </a:extLst>
           </p:cNvPr>
@@ -12309,7 +12317,7 @@
           <p:cNvPr id="11" name="">
             <a:extLst xmlns:a="http://schemas.openxmlformats.org/drawingml/2006/main">
               <a:ext uri="{FF2B5EF4-FFF2-40B4-BE49-F238E27FC236}">
-                <a16:creationId xmlns:a16="http://schemas.microsoft.com/office/drawing/2014/main" id="{0127D9D4-0A46-4B9E-BF48-697E3D4E1592}"/>
+                <a16:creationId xmlns:a16="http://schemas.microsoft.com/office/drawing/2014/main" id="{00B2FF08-6F14-4B83-BBE5-BC3A9E75EBF2}"/>
               </a:ext>
             </a:extLst>
           </p:cNvPr>
@@ -12341,7 +12349,7 @@
           <p:cNvPr id="12" name="">
             <a:extLst xmlns:a="http://schemas.openxmlformats.org/drawingml/2006/main">
               <a:ext uri="{FF2B5EF4-FFF2-40B4-BE49-F238E27FC236}">
-                <a16:creationId xmlns:a16="http://schemas.microsoft.com/office/drawing/2014/main" id="{6F37A66A-89EB-4DB6-BF0C-95E03A95B336}"/>
+                <a16:creationId xmlns:a16="http://schemas.microsoft.com/office/drawing/2014/main" id="{434ACB80-E392-446C-8F71-6899D229C649}"/>
               </a:ext>
             </a:extLst>
           </p:cNvPr>
@@ -12398,7 +12406,7 @@
           <p:cNvPr id="13" name="">
             <a:extLst xmlns:a="http://schemas.openxmlformats.org/drawingml/2006/main">
               <a:ext uri="{FF2B5EF4-FFF2-40B4-BE49-F238E27FC236}">
-                <a16:creationId xmlns:a16="http://schemas.microsoft.com/office/drawing/2014/main" id="{EF01DCDC-2354-46D5-B1C6-5ED74C207F41}"/>
+                <a16:creationId xmlns:a16="http://schemas.microsoft.com/office/drawing/2014/main" id="{3899FC26-B650-45B5-A4B1-E03D9391C14A}"/>
               </a:ext>
             </a:extLst>
           </p:cNvPr>
@@ -12455,7 +12463,7 @@
           <p:cNvPr id="14" name="">
             <a:extLst xmlns:a="http://schemas.openxmlformats.org/drawingml/2006/main">
               <a:ext uri="{FF2B5EF4-FFF2-40B4-BE49-F238E27FC236}">
-                <a16:creationId xmlns:a16="http://schemas.microsoft.com/office/drawing/2014/main" id="{A1977F15-6DA2-4133-A862-C05E61795721}"/>
+                <a16:creationId xmlns:a16="http://schemas.microsoft.com/office/drawing/2014/main" id="{E9663D0A-40D5-49E3-848E-B4E2CBBF7202}"/>
               </a:ext>
             </a:extLst>
           </p:cNvPr>
@@ -12489,7 +12497,7 @@
           <p:cNvPr id="15" name="">
             <a:extLst xmlns:a="http://schemas.openxmlformats.org/drawingml/2006/main">
               <a:ext uri="{FF2B5EF4-FFF2-40B4-BE49-F238E27FC236}">
-                <a16:creationId xmlns:a16="http://schemas.microsoft.com/office/drawing/2014/main" id="{8704177C-2B4E-44B0-8CBE-ED2661006462}"/>
+                <a16:creationId xmlns:a16="http://schemas.microsoft.com/office/drawing/2014/main" id="{7DBBB004-354D-4E18-AD02-B3EF8F7A477A}"/>
               </a:ext>
             </a:extLst>
           </p:cNvPr>
@@ -12521,7 +12529,7 @@
           <p:cNvPr id="16" name="">
             <a:extLst xmlns:a="http://schemas.openxmlformats.org/drawingml/2006/main">
               <a:ext uri="{FF2B5EF4-FFF2-40B4-BE49-F238E27FC236}">
-                <a16:creationId xmlns:a16="http://schemas.microsoft.com/office/drawing/2014/main" id="{9E1B53C3-5B3E-4A66-8092-602679988230}"/>
+                <a16:creationId xmlns:a16="http://schemas.microsoft.com/office/drawing/2014/main" id="{0E48CD53-E9EE-4982-B0FE-58C4F6732149}"/>
               </a:ext>
             </a:extLst>
           </p:cNvPr>
@@ -12578,7 +12586,7 @@
           <p:cNvPr id="17" name="">
             <a:extLst xmlns:a="http://schemas.openxmlformats.org/drawingml/2006/main">
               <a:ext uri="{FF2B5EF4-FFF2-40B4-BE49-F238E27FC236}">
-                <a16:creationId xmlns:a16="http://schemas.microsoft.com/office/drawing/2014/main" id="{7D6654FE-8E26-4877-9F49-DC66C328A980}"/>
+                <a16:creationId xmlns:a16="http://schemas.microsoft.com/office/drawing/2014/main" id="{2C1E64DB-C166-4F3C-8EDA-8608AAAA8A14}"/>
               </a:ext>
             </a:extLst>
           </p:cNvPr>
@@ -12635,7 +12643,7 @@
           <p:cNvPr id="18" name="">
             <a:extLst xmlns:a="http://schemas.openxmlformats.org/drawingml/2006/main">
               <a:ext uri="{FF2B5EF4-FFF2-40B4-BE49-F238E27FC236}">
-                <a16:creationId xmlns:a16="http://schemas.microsoft.com/office/drawing/2014/main" id="{DFFFEBFD-5B38-45D3-A517-56BDF5BD837A}"/>
+                <a16:creationId xmlns:a16="http://schemas.microsoft.com/office/drawing/2014/main" id="{EB6D91B9-CB9C-41A3-BB0F-81C4967AC223}"/>
               </a:ext>
             </a:extLst>
           </p:cNvPr>
@@ -12669,7 +12677,7 @@
           <p:cNvPr id="19" name="">
             <a:extLst xmlns:a="http://schemas.openxmlformats.org/drawingml/2006/main">
               <a:ext uri="{FF2B5EF4-FFF2-40B4-BE49-F238E27FC236}">
-                <a16:creationId xmlns:a16="http://schemas.microsoft.com/office/drawing/2014/main" id="{17D19600-67E9-4B77-AF03-FB02680C66DB}"/>
+                <a16:creationId xmlns:a16="http://schemas.microsoft.com/office/drawing/2014/main" id="{334C76F2-BAA6-4F0F-AEEC-37091DAAC19A}"/>
               </a:ext>
             </a:extLst>
           </p:cNvPr>
@@ -12701,7 +12709,7 @@
           <p:cNvPr id="20" name="">
             <a:extLst xmlns:a="http://schemas.openxmlformats.org/drawingml/2006/main">
               <a:ext uri="{FF2B5EF4-FFF2-40B4-BE49-F238E27FC236}">
-                <a16:creationId xmlns:a16="http://schemas.microsoft.com/office/drawing/2014/main" id="{AA7BAB5E-6D66-4F93-91CC-EDA3439172FB}"/>
+                <a16:creationId xmlns:a16="http://schemas.microsoft.com/office/drawing/2014/main" id="{6B8AA598-4CCC-4A75-9157-71CDB11B625D}"/>
               </a:ext>
             </a:extLst>
           </p:cNvPr>
@@ -12758,7 +12766,7 @@
           <p:cNvPr id="21" name="">
             <a:extLst xmlns:a="http://schemas.openxmlformats.org/drawingml/2006/main">
               <a:ext uri="{FF2B5EF4-FFF2-40B4-BE49-F238E27FC236}">
-                <a16:creationId xmlns:a16="http://schemas.microsoft.com/office/drawing/2014/main" id="{360710A3-D425-4A82-9B29-548BD2CDA623}"/>
+                <a16:creationId xmlns:a16="http://schemas.microsoft.com/office/drawing/2014/main" id="{289FBFF2-785A-47AB-8C51-036DE6B8CF5C}"/>
               </a:ext>
             </a:extLst>
           </p:cNvPr>
@@ -12815,7 +12823,7 @@
           <p:cNvPr id="22" name="">
             <a:extLst xmlns:a="http://schemas.openxmlformats.org/drawingml/2006/main">
               <a:ext uri="{FF2B5EF4-FFF2-40B4-BE49-F238E27FC236}">
-                <a16:creationId xmlns:a16="http://schemas.microsoft.com/office/drawing/2014/main" id="{38487938-4548-4A6D-84DE-B03B7795B395}"/>
+                <a16:creationId xmlns:a16="http://schemas.microsoft.com/office/drawing/2014/main" id="{D1962E11-A522-40D0-B2D4-4BD94D98CA2C}"/>
               </a:ext>
             </a:extLst>
           </p:cNvPr>
@@ -12870,7 +12878,7 @@
     </p:spTree>
     <p:extLst>
       <p:ext uri="{BB962C8B-B14F-4D97-AF65-F5344CB8AC3E}">
-        <p14:creationId xmlns:p14="http://schemas.microsoft.com/office/powerpoint/2010/main" val="2035866039"/>
+        <p14:creationId xmlns:p14="http://schemas.microsoft.com/office/powerpoint/2010/main" val="1960507852"/>
       </p:ext>
     </p:extLst>
   </p:cSld>
@@ -13071,7 +13079,7 @@
           <p:cNvPr id="22" name="">
             <a:extLst xmlns:a="http://schemas.openxmlformats.org/drawingml/2006/main">
               <a:ext uri="{FF2B5EF4-FFF2-40B4-BE49-F238E27FC236}">
-                <a16:creationId xmlns:a16="http://schemas.microsoft.com/office/drawing/2014/main" id="{6628B848-3B75-4ADC-B1BA-27F0549F7934}"/>
+                <a16:creationId xmlns:a16="http://schemas.microsoft.com/office/drawing/2014/main" id="{DEC34C57-313E-4E5D-9E46-2CCC8B0A80CD}"/>
               </a:ext>
             </a:extLst>
           </p:cNvPr>
@@ -13103,7 +13111,7 @@
           <p:cNvPr id="2" name="">
             <a:extLst xmlns:a="http://schemas.openxmlformats.org/drawingml/2006/main">
               <a:ext uri="{FF2B5EF4-FFF2-40B4-BE49-F238E27FC236}">
-                <a16:creationId xmlns:a16="http://schemas.microsoft.com/office/drawing/2014/main" id="{DF9B595D-1BE6-4222-AD05-E41A34925698}"/>
+                <a16:creationId xmlns:a16="http://schemas.microsoft.com/office/drawing/2014/main" id="{64C3D117-83FB-4A0B-8B55-F676C8557038}"/>
               </a:ext>
             </a:extLst>
           </p:cNvPr>
@@ -13160,7 +13168,7 @@
           <p:cNvPr id="3" name="">
             <a:extLst xmlns:a="http://schemas.openxmlformats.org/drawingml/2006/main">
               <a:ext uri="{FF2B5EF4-FFF2-40B4-BE49-F238E27FC236}">
-                <a16:creationId xmlns:a16="http://schemas.microsoft.com/office/drawing/2014/main" id="{DB3D14C6-426B-42BF-98E0-395E957222FD}"/>
+                <a16:creationId xmlns:a16="http://schemas.microsoft.com/office/drawing/2014/main" id="{309404CA-F5C6-4EFF-B56F-7AB28988CE16}"/>
               </a:ext>
             </a:extLst>
           </p:cNvPr>
@@ -13192,7 +13200,7 @@
           <p:cNvPr id="4" name="">
             <a:extLst xmlns:a="http://schemas.openxmlformats.org/drawingml/2006/main">
               <a:ext uri="{FF2B5EF4-FFF2-40B4-BE49-F238E27FC236}">
-                <a16:creationId xmlns:a16="http://schemas.microsoft.com/office/drawing/2014/main" id="{5745C6BA-1BB4-402C-9C3D-D7369B7CC213}"/>
+                <a16:creationId xmlns:a16="http://schemas.microsoft.com/office/drawing/2014/main" id="{772DBFC1-EFBC-454B-97E1-3702CA705624}"/>
               </a:ext>
             </a:extLst>
           </p:cNvPr>
@@ -13249,7 +13257,7 @@
           <p:cNvPr id="5" name="">
             <a:extLst xmlns:a="http://schemas.openxmlformats.org/drawingml/2006/main">
               <a:ext uri="{FF2B5EF4-FFF2-40B4-BE49-F238E27FC236}">
-                <a16:creationId xmlns:a16="http://schemas.microsoft.com/office/drawing/2014/main" id="{7B385BCE-CC2C-4006-BE9E-FDF91177465F}"/>
+                <a16:creationId xmlns:a16="http://schemas.microsoft.com/office/drawing/2014/main" id="{5E996637-F07B-4B39-89CA-83A9927264CA}"/>
               </a:ext>
             </a:extLst>
           </p:cNvPr>
@@ -13306,7 +13314,7 @@
           <p:cNvPr id="6" name="">
             <a:extLst xmlns:a="http://schemas.openxmlformats.org/drawingml/2006/main">
               <a:ext uri="{FF2B5EF4-FFF2-40B4-BE49-F238E27FC236}">
-                <a16:creationId xmlns:a16="http://schemas.microsoft.com/office/drawing/2014/main" id="{7A580D1F-EE51-4E36-AEE9-0A0B04675A8F}"/>
+                <a16:creationId xmlns:a16="http://schemas.microsoft.com/office/drawing/2014/main" id="{D28A8190-C92A-41F0-9E14-639F41ED0C09}"/>
               </a:ext>
             </a:extLst>
           </p:cNvPr>
@@ -13363,7 +13371,7 @@
           <p:cNvPr id="7" name="">
             <a:extLst xmlns:a="http://schemas.openxmlformats.org/drawingml/2006/main">
               <a:ext uri="{FF2B5EF4-FFF2-40B4-BE49-F238E27FC236}">
-                <a16:creationId xmlns:a16="http://schemas.microsoft.com/office/drawing/2014/main" id="{DE3A99B5-DB24-4EDA-88F9-78B2951AB88D}"/>
+                <a16:creationId xmlns:a16="http://schemas.microsoft.com/office/drawing/2014/main" id="{B4A6317D-F860-4862-AC44-2E6688B4BE26}"/>
               </a:ext>
             </a:extLst>
           </p:cNvPr>
@@ -13395,7 +13403,7 @@
           <p:cNvPr id="8" name="">
             <a:extLst xmlns:a="http://schemas.openxmlformats.org/drawingml/2006/main">
               <a:ext uri="{FF2B5EF4-FFF2-40B4-BE49-F238E27FC236}">
-                <a16:creationId xmlns:a16="http://schemas.microsoft.com/office/drawing/2014/main" id="{CE1B7159-0178-4ADF-AB64-CC18302C77BD}"/>
+                <a16:creationId xmlns:a16="http://schemas.microsoft.com/office/drawing/2014/main" id="{D0FE3376-7196-40BE-ABB9-2627C27D266A}"/>
               </a:ext>
             </a:extLst>
           </p:cNvPr>
@@ -13452,7 +13460,7 @@
           <p:cNvPr id="9" name="">
             <a:extLst xmlns:a="http://schemas.openxmlformats.org/drawingml/2006/main">
               <a:ext uri="{FF2B5EF4-FFF2-40B4-BE49-F238E27FC236}">
-                <a16:creationId xmlns:a16="http://schemas.microsoft.com/office/drawing/2014/main" id="{07F0480C-DD01-4A32-B77C-E162CE6F88BF}"/>
+                <a16:creationId xmlns:a16="http://schemas.microsoft.com/office/drawing/2014/main" id="{4E3A8B02-9F66-4B74-9FD5-E56CA2A7C3F0}"/>
               </a:ext>
             </a:extLst>
           </p:cNvPr>
@@ -13509,7 +13517,7 @@
           <p:cNvPr id="10" name="">
             <a:extLst xmlns:a="http://schemas.openxmlformats.org/drawingml/2006/main">
               <a:ext uri="{FF2B5EF4-FFF2-40B4-BE49-F238E27FC236}">
-                <a16:creationId xmlns:a16="http://schemas.microsoft.com/office/drawing/2014/main" id="{9D65B819-D115-417B-BA43-56EA919A409E}"/>
+                <a16:creationId xmlns:a16="http://schemas.microsoft.com/office/drawing/2014/main" id="{4A60D502-C08E-4786-BF42-5BA7829FCFB5}"/>
               </a:ext>
             </a:extLst>
           </p:cNvPr>
@@ -13543,7 +13551,7 @@
           <p:cNvPr id="11" name="">
             <a:extLst xmlns:a="http://schemas.openxmlformats.org/drawingml/2006/main">
               <a:ext uri="{FF2B5EF4-FFF2-40B4-BE49-F238E27FC236}">
-                <a16:creationId xmlns:a16="http://schemas.microsoft.com/office/drawing/2014/main" id="{58D43E18-2243-4FA3-A8CD-8A126FC69DFB}"/>
+                <a16:creationId xmlns:a16="http://schemas.microsoft.com/office/drawing/2014/main" id="{FEDE3238-59C5-4501-AA52-5CC4790A34F2}"/>
               </a:ext>
             </a:extLst>
           </p:cNvPr>
@@ -13575,7 +13583,7 @@
           <p:cNvPr id="12" name="">
             <a:extLst xmlns:a="http://schemas.openxmlformats.org/drawingml/2006/main">
               <a:ext uri="{FF2B5EF4-FFF2-40B4-BE49-F238E27FC236}">
-                <a16:creationId xmlns:a16="http://schemas.microsoft.com/office/drawing/2014/main" id="{0A7BEB54-A117-4E01-A4DF-AA6C0D3BE68A}"/>
+                <a16:creationId xmlns:a16="http://schemas.microsoft.com/office/drawing/2014/main" id="{3833077F-EE1E-480C-9808-DD5604923C61}"/>
               </a:ext>
             </a:extLst>
           </p:cNvPr>
@@ -13632,7 +13640,7 @@
           <p:cNvPr id="13" name="">
             <a:extLst xmlns:a="http://schemas.openxmlformats.org/drawingml/2006/main">
               <a:ext uri="{FF2B5EF4-FFF2-40B4-BE49-F238E27FC236}">
-                <a16:creationId xmlns:a16="http://schemas.microsoft.com/office/drawing/2014/main" id="{D5D50789-1EE0-4574-A15C-5D998032C196}"/>
+                <a16:creationId xmlns:a16="http://schemas.microsoft.com/office/drawing/2014/main" id="{3C4DF30F-535F-4CBE-9B3C-C87817795795}"/>
               </a:ext>
             </a:extLst>
           </p:cNvPr>
@@ -13689,7 +13697,7 @@
           <p:cNvPr id="14" name="">
             <a:extLst xmlns:a="http://schemas.openxmlformats.org/drawingml/2006/main">
               <a:ext uri="{FF2B5EF4-FFF2-40B4-BE49-F238E27FC236}">
-                <a16:creationId xmlns:a16="http://schemas.microsoft.com/office/drawing/2014/main" id="{3F33A5E8-188F-4F15-B58C-E973F1FC336D}"/>
+                <a16:creationId xmlns:a16="http://schemas.microsoft.com/office/drawing/2014/main" id="{2D15539E-51D3-4FE6-902B-5EC282EB03F3}"/>
               </a:ext>
             </a:extLst>
           </p:cNvPr>
@@ -13723,7 +13731,7 @@
           <p:cNvPr id="15" name="">
             <a:extLst xmlns:a="http://schemas.openxmlformats.org/drawingml/2006/main">
               <a:ext uri="{FF2B5EF4-FFF2-40B4-BE49-F238E27FC236}">
-                <a16:creationId xmlns:a16="http://schemas.microsoft.com/office/drawing/2014/main" id="{275BDCCE-7815-46A9-A278-98B328E1B690}"/>
+                <a16:creationId xmlns:a16="http://schemas.microsoft.com/office/drawing/2014/main" id="{953F72E1-A778-413E-A73D-94831B1A6EEA}"/>
               </a:ext>
             </a:extLst>
           </p:cNvPr>
@@ -13755,7 +13763,7 @@
           <p:cNvPr id="16" name="">
             <a:extLst xmlns:a="http://schemas.openxmlformats.org/drawingml/2006/main">
               <a:ext uri="{FF2B5EF4-FFF2-40B4-BE49-F238E27FC236}">
-                <a16:creationId xmlns:a16="http://schemas.microsoft.com/office/drawing/2014/main" id="{BCED02D4-DDB2-491B-9894-11629FF66452}"/>
+                <a16:creationId xmlns:a16="http://schemas.microsoft.com/office/drawing/2014/main" id="{466BD7EE-7727-4B10-89BF-A7E546E86C0B}"/>
               </a:ext>
             </a:extLst>
           </p:cNvPr>
@@ -13812,7 +13820,7 @@
           <p:cNvPr id="17" name="">
             <a:extLst xmlns:a="http://schemas.openxmlformats.org/drawingml/2006/main">
               <a:ext uri="{FF2B5EF4-FFF2-40B4-BE49-F238E27FC236}">
-                <a16:creationId xmlns:a16="http://schemas.microsoft.com/office/drawing/2014/main" id="{3320F261-3CE1-4D43-9DC1-1E4D4951E6D6}"/>
+                <a16:creationId xmlns:a16="http://schemas.microsoft.com/office/drawing/2014/main" id="{D0A8BF23-7BD7-4902-9F59-6D4D2B16BDFA}"/>
               </a:ext>
             </a:extLst>
           </p:cNvPr>
@@ -13869,7 +13877,7 @@
           <p:cNvPr id="18" name="">
             <a:extLst xmlns:a="http://schemas.openxmlformats.org/drawingml/2006/main">
               <a:ext uri="{FF2B5EF4-FFF2-40B4-BE49-F238E27FC236}">
-                <a16:creationId xmlns:a16="http://schemas.microsoft.com/office/drawing/2014/main" id="{D57B6CD0-20A1-441F-89A7-34C89821D79F}"/>
+                <a16:creationId xmlns:a16="http://schemas.microsoft.com/office/drawing/2014/main" id="{3D4897B5-2C38-4D0B-BBEA-41673BE0FB7D}"/>
               </a:ext>
             </a:extLst>
           </p:cNvPr>
@@ -13903,7 +13911,7 @@
           <p:cNvPr id="19" name="">
             <a:extLst xmlns:a="http://schemas.openxmlformats.org/drawingml/2006/main">
               <a:ext uri="{FF2B5EF4-FFF2-40B4-BE49-F238E27FC236}">
-                <a16:creationId xmlns:a16="http://schemas.microsoft.com/office/drawing/2014/main" id="{E4692AD1-91B0-4CF4-A984-1671EB0EFE67}"/>
+                <a16:creationId xmlns:a16="http://schemas.microsoft.com/office/drawing/2014/main" id="{4812276D-532D-4D09-80FB-5B46CB2A2576}"/>
               </a:ext>
             </a:extLst>
           </p:cNvPr>
@@ -13935,7 +13943,7 @@
           <p:cNvPr id="20" name="">
             <a:extLst xmlns:a="http://schemas.openxmlformats.org/drawingml/2006/main">
               <a:ext uri="{FF2B5EF4-FFF2-40B4-BE49-F238E27FC236}">
-                <a16:creationId xmlns:a16="http://schemas.microsoft.com/office/drawing/2014/main" id="{A18FAB11-3612-463C-90C7-64FA975E74B6}"/>
+                <a16:creationId xmlns:a16="http://schemas.microsoft.com/office/drawing/2014/main" id="{16E86195-9649-47B4-80C6-1750931875FA}"/>
               </a:ext>
             </a:extLst>
           </p:cNvPr>
@@ -13992,7 +14000,7 @@
           <p:cNvPr id="21" name="">
             <a:extLst xmlns:a="http://schemas.openxmlformats.org/drawingml/2006/main">
               <a:ext uri="{FF2B5EF4-FFF2-40B4-BE49-F238E27FC236}">
-                <a16:creationId xmlns:a16="http://schemas.microsoft.com/office/drawing/2014/main" id="{BB2554B8-AD29-4D9B-907C-A464F09B5984}"/>
+                <a16:creationId xmlns:a16="http://schemas.microsoft.com/office/drawing/2014/main" id="{3E5C43CE-866D-4803-A3FD-8A819CC449AB}"/>
               </a:ext>
             </a:extLst>
           </p:cNvPr>
@@ -14047,7 +14055,7 @@
     </p:spTree>
     <p:extLst>
       <p:ext uri="{BB962C8B-B14F-4D97-AF65-F5344CB8AC3E}">
-        <p14:creationId xmlns:p14="http://schemas.microsoft.com/office/powerpoint/2010/main" val="1725992200"/>
+        <p14:creationId xmlns:p14="http://schemas.microsoft.com/office/powerpoint/2010/main" val="1536465903"/>
       </p:ext>
     </p:extLst>
   </p:cSld>
